--- a/course/lectures/act-2-delegation-and-control/01-delegation/2-1-Agents.pptx
+++ b/course/lectures/act-2-delegation-and-control/01-delegation/2-1-Agents.pptx
@@ -532,7 +532,7 @@
           <a:p>
             <a:r>
               <a:rPr dirty="0"/>
-              <a:t xml:space="preserve">0.5 minutes — </a:t>
+              <a:t>0.5 minutes — </a:t>
             </a:r>
             <a:r>
               <a:rPr i="1" dirty="0"/>
@@ -604,7 +604,7 @@
           <a:p>
             <a:r>
               <a:rPr dirty="0"/>
-              <a:t xml:space="preserve">2.5 minutes — </a:t>
+              <a:t>2.5 minutes — </a:t>
             </a:r>
             <a:r>
               <a:rPr i="1" dirty="0"/>
@@ -688,7 +688,7 @@
           <a:p>
             <a:r>
               <a:rPr dirty="0"/>
-              <a:t xml:space="preserve">0.5 minutes — </a:t>
+              <a:t>0.5 minutes — </a:t>
             </a:r>
             <a:r>
               <a:rPr i="1" dirty="0"/>
@@ -754,7 +754,7 @@
           <a:p>
             <a:r>
               <a:rPr dirty="0"/>
-              <a:t xml:space="preserve">2 minutes — </a:t>
+              <a:t>2 minutes — </a:t>
             </a:r>
             <a:r>
               <a:rPr i="1" dirty="0"/>
@@ -832,7 +832,7 @@
           <a:p>
             <a:r>
               <a:rPr dirty="0"/>
-              <a:t xml:space="preserve">2.5 minutes — </a:t>
+              <a:t>2.5 minutes — </a:t>
             </a:r>
             <a:r>
               <a:rPr i="1" dirty="0"/>
@@ -910,7 +910,7 @@
           <a:p>
             <a:r>
               <a:rPr dirty="0"/>
-              <a:t xml:space="preserve">2 minutes — </a:t>
+              <a:t>2 minutes — </a:t>
             </a:r>
             <a:r>
               <a:rPr i="1" dirty="0"/>
@@ -988,7 +988,7 @@
           <a:p>
             <a:r>
               <a:rPr dirty="0"/>
-              <a:t xml:space="preserve">2.5 minutes — </a:t>
+              <a:t>2.5 minutes — </a:t>
             </a:r>
             <a:r>
               <a:rPr i="1" dirty="0"/>
@@ -1066,7 +1066,7 @@
           <a:p>
             <a:r>
               <a:rPr dirty="0"/>
-              <a:t xml:space="preserve">2 minutes — </a:t>
+              <a:t>2 minutes — </a:t>
             </a:r>
             <a:r>
               <a:rPr i="1" dirty="0"/>
@@ -1144,7 +1144,7 @@
           <a:p>
             <a:r>
               <a:rPr dirty="0"/>
-              <a:t xml:space="preserve">2 minutes — </a:t>
+              <a:t>2 minutes — </a:t>
             </a:r>
             <a:r>
               <a:rPr i="1" dirty="0"/>
@@ -1222,7 +1222,7 @@
           <a:p>
             <a:r>
               <a:rPr dirty="0"/>
-              <a:t xml:space="preserve">2.5 minutes — </a:t>
+              <a:t>2.5 minutes — </a:t>
             </a:r>
             <a:r>
               <a:rPr i="1" dirty="0"/>
@@ -1306,7 +1306,7 @@
           <a:p>
             <a:r>
               <a:rPr dirty="0"/>
-              <a:t xml:space="preserve">1.5 minutes — </a:t>
+              <a:t>1.5 minutes — </a:t>
             </a:r>
             <a:r>
               <a:rPr i="1" dirty="0"/>
@@ -1384,7 +1384,7 @@
           <a:p>
             <a:r>
               <a:rPr dirty="0"/>
-              <a:t xml:space="preserve">1 minute — </a:t>
+              <a:t>1 minute — </a:t>
             </a:r>
             <a:r>
               <a:rPr i="1" dirty="0"/>
@@ -1456,7 +1456,7 @@
           <a:p>
             <a:r>
               <a:rPr dirty="0"/>
-              <a:t xml:space="preserve">10 minutes — </a:t>
+              <a:t>10 minutes — </a:t>
             </a:r>
             <a:r>
               <a:rPr i="1" dirty="0"/>
@@ -1534,7 +1534,7 @@
           <a:p>
             <a:r>
               <a:rPr dirty="0"/>
-              <a:t xml:space="preserve">5 minutes — </a:t>
+              <a:t>5 minutes — </a:t>
             </a:r>
             <a:r>
               <a:rPr i="1" dirty="0"/>
@@ -1594,7 +1594,7 @@
           <a:p>
             <a:r>
               <a:rPr dirty="0"/>
-              <a:t xml:space="preserve">1 minute — </a:t>
+              <a:t>1 minute — </a:t>
             </a:r>
             <a:r>
               <a:rPr i="1" dirty="0"/>
@@ -1660,7 +1660,7 @@
           <a:p>
             <a:r>
               <a:rPr dirty="0"/>
-              <a:t xml:space="preserve">2 minutes — </a:t>
+              <a:t>2 minutes — </a:t>
             </a:r>
             <a:r>
               <a:rPr i="1" dirty="0"/>
@@ -1732,7 +1732,7 @@
           <a:p>
             <a:r>
               <a:rPr dirty="0"/>
-              <a:t xml:space="preserve">2 minutes — </a:t>
+              <a:t>2 minutes — </a:t>
             </a:r>
             <a:r>
               <a:rPr i="1" dirty="0"/>
@@ -1810,7 +1810,7 @@
           <a:p>
             <a:r>
               <a:rPr dirty="0"/>
-              <a:t xml:space="preserve">3 minutes — </a:t>
+              <a:t>3 minutes — </a:t>
             </a:r>
             <a:r>
               <a:rPr i="1" dirty="0"/>
@@ -1894,7 +1894,7 @@
           <a:p>
             <a:r>
               <a:rPr dirty="0"/>
-              <a:t xml:space="preserve">0.5 minutes — </a:t>
+              <a:t>0.5 minutes — </a:t>
             </a:r>
             <a:r>
               <a:rPr i="1" dirty="0"/>
@@ -1960,7 +1960,7 @@
           <a:p>
             <a:r>
               <a:rPr dirty="0"/>
-              <a:t xml:space="preserve">2.5 minutes — </a:t>
+              <a:t>2.5 minutes — </a:t>
             </a:r>
             <a:r>
               <a:rPr i="1" dirty="0"/>
@@ -2032,7 +2032,7 @@
           <a:p>
             <a:r>
               <a:rPr dirty="0"/>
-              <a:t xml:space="preserve">1.5 minutes — </a:t>
+              <a:t>1.5 minutes — </a:t>
             </a:r>
             <a:r>
               <a:rPr i="1" dirty="0"/>
@@ -2104,7 +2104,7 @@
           <a:p>
             <a:r>
               <a:rPr dirty="0"/>
-              <a:t xml:space="preserve">0.5 minutes — </a:t>
+              <a:t>0.5 minutes — </a:t>
             </a:r>
             <a:r>
               <a:rPr i="1" dirty="0"/>
@@ -2164,7 +2164,7 @@
           <a:p>
             <a:r>
               <a:rPr dirty="0"/>
-              <a:t xml:space="preserve">2 minutes — </a:t>
+              <a:t>2 minutes — </a:t>
             </a:r>
             <a:r>
               <a:rPr i="1" dirty="0"/>
@@ -2248,7 +2248,7 @@
           <a:p>
             <a:r>
               <a:rPr dirty="0"/>
-              <a:t xml:space="preserve">2 minutes — </a:t>
+              <a:t>2 minutes — </a:t>
             </a:r>
             <a:r>
               <a:rPr i="1" dirty="0"/>
@@ -2326,7 +2326,7 @@
           <a:p>
             <a:r>
               <a:rPr dirty="0"/>
-              <a:t xml:space="preserve">2 minutes — </a:t>
+              <a:t>2 minutes — </a:t>
             </a:r>
             <a:r>
               <a:rPr i="1" dirty="0"/>
@@ -2398,7 +2398,7 @@
           <a:p>
             <a:r>
               <a:rPr dirty="0"/>
-              <a:t xml:space="preserve">6 minutes — </a:t>
+              <a:t>6 minutes — </a:t>
             </a:r>
             <a:r>
               <a:rPr i="1" dirty="0"/>
@@ -2476,7 +2476,7 @@
           <a:p>
             <a:r>
               <a:rPr dirty="0"/>
-              <a:t xml:space="preserve">1.5 minutes — </a:t>
+              <a:t>1.5 minutes — </a:t>
             </a:r>
             <a:r>
               <a:rPr i="1" dirty="0"/>
@@ -2548,7 +2548,7 @@
           <a:p>
             <a:r>
               <a:rPr dirty="0"/>
-              <a:t xml:space="preserve">0.5 minutes — </a:t>
+              <a:t>0.5 minutes — </a:t>
             </a:r>
             <a:r>
               <a:rPr i="1" dirty="0"/>
@@ -2620,7 +2620,7 @@
           <a:p>
             <a:r>
               <a:rPr dirty="0"/>
-              <a:t xml:space="preserve">3 minutes — </a:t>
+              <a:t>3 minutes — </a:t>
             </a:r>
             <a:r>
               <a:rPr i="1" dirty="0"/>
@@ -2704,7 +2704,7 @@
           <a:p>
             <a:r>
               <a:rPr dirty="0"/>
-              <a:t xml:space="preserve">1.5 minutes — </a:t>
+              <a:t>1.5 minutes — </a:t>
             </a:r>
             <a:r>
               <a:rPr i="1" dirty="0"/>
@@ -2782,7 +2782,7 @@
           <a:p>
             <a:r>
               <a:rPr dirty="0"/>
-              <a:t xml:space="preserve">0.5 minutes — </a:t>
+              <a:t>0.5 minutes — </a:t>
             </a:r>
             <a:r>
               <a:rPr i="1" dirty="0"/>
@@ -2848,7 +2848,7 @@
           <a:p>
             <a:r>
               <a:rPr dirty="0"/>
-              <a:t xml:space="preserve">2.5 minutes — </a:t>
+              <a:t>2.5 minutes — </a:t>
             </a:r>
             <a:r>
               <a:rPr i="1" dirty="0"/>
@@ -2932,7 +2932,7 @@
           <a:p>
             <a:r>
               <a:rPr dirty="0"/>
-              <a:t xml:space="preserve">2 minutes — </a:t>
+              <a:t>2 minutes — </a:t>
             </a:r>
             <a:r>
               <a:rPr i="1" dirty="0"/>
@@ -3010,7 +3010,7 @@
           <a:p>
             <a:r>
               <a:rPr dirty="0"/>
-              <a:t xml:space="preserve">2.5 minutes — </a:t>
+              <a:t>2.5 minutes — </a:t>
             </a:r>
             <a:r>
               <a:rPr i="1" dirty="0"/>
@@ -5619,7 +5619,7 @@
             </a:r>
             <a:r>
               <a:rPr lang="en-US" b="1" u="none" dirty="0"/>
-              <a:t xml:space="preserve">		Details</a:t>
+              <a:t>		Details</a:t>
             </a:r>
           </a:p>
           <a:p>
@@ -5796,7 +5796,7 @@
             </a:r>
             <a:r>
               <a:rPr lang="en-US" b="1" u="none" dirty="0"/>
-              <a:t xml:space="preserve">		Details</a:t>
+              <a:t>		Details</a:t>
             </a:r>
           </a:p>
           <a:p>
@@ -7184,7 +7184,7 @@
               <a:buNone/>
             </a:pPr>
             <a:r>
-              <a:rPr lang="en-US" sz="1600" b="0" i="0" dirty="0">
+              <a:rPr lang="en-US" sz="1800" b="0" i="0" dirty="0">
                 <a:solidFill>
                   <a:srgbClr val="555960"/>
                 </a:solidFill>
@@ -7225,7 +7225,7 @@
               <a:buNone/>
             </a:pPr>
             <a:r>
-              <a:rPr lang="en-US" sz="1600" b="0" i="0" dirty="0">
+              <a:rPr lang="en-US" sz="1800" b="0" i="0" dirty="0">
                 <a:solidFill>
                   <a:srgbClr val="555960"/>
                 </a:solidFill>
@@ -7266,7 +7266,7 @@
               <a:buNone/>
             </a:pPr>
             <a:r>
-              <a:rPr lang="en-US" sz="1600" b="0" i="0" dirty="0">
+              <a:rPr lang="en-US" sz="1800" b="0" i="0" dirty="0">
                 <a:solidFill>
                   <a:srgbClr val="555960"/>
                 </a:solidFill>
@@ -7502,7 +7502,7 @@
             <a:avLst/>
           </a:prstGeom>
           <a:solidFill>
-            <a:srgbClr val="F5F1E8"/>
+            <a:srgbClr val="FBF8F2"/>
           </a:solidFill>
           <a:ln w="12700">
             <a:solidFill>
@@ -9194,7 +9194,7 @@
                   <a:srgbClr val="555960"/>
                 </a:solidFill>
               </a:rPr>
-              <a:t xml:space="preserve">context · instructions · retrieval · memory · </a:t>
+              <a:t>context · instructions · retrieval · memory · </a:t>
             </a:r>
             <a:r>
               <a:rPr lang="en-US" sz="1800" b="1" i="0" dirty="0">
@@ -9921,7 +9921,7 @@
               <a:buNone/>
             </a:pPr>
             <a:r>
-              <a:rPr lang="en-US" sz="1500" b="1" i="0" dirty="0">
+              <a:rPr lang="en-US" sz="1700" b="1" i="0" dirty="0">
                 <a:solidFill>
                   <a:srgbClr val="5C4826"/>
                 </a:solidFill>
@@ -9962,7 +9962,7 @@
               <a:buNone/>
             </a:pPr>
             <a:r>
-              <a:rPr lang="en-US" sz="1500" b="1" i="0" dirty="0">
+              <a:rPr lang="en-US" sz="1700" b="1" i="0" dirty="0">
                 <a:solidFill>
                   <a:srgbClr val="5C4826"/>
                 </a:solidFill>
@@ -10003,7 +10003,7 @@
               <a:buNone/>
             </a:pPr>
             <a:r>
-              <a:rPr lang="en-US" sz="1500" b="1" i="0" dirty="0">
+              <a:rPr lang="en-US" sz="1700" b="1" i="0" dirty="0">
                 <a:solidFill>
                   <a:srgbClr val="5C4826"/>
                 </a:solidFill>
@@ -10044,7 +10044,7 @@
               <a:buNone/>
             </a:pPr>
             <a:r>
-              <a:rPr lang="en-US" sz="1500" b="1" i="0" dirty="0">
+              <a:rPr lang="en-US" sz="1700" b="1" i="0" dirty="0">
                 <a:solidFill>
                   <a:srgbClr val="5C4826"/>
                 </a:solidFill>
@@ -10085,7 +10085,7 @@
               <a:buNone/>
             </a:pPr>
             <a:r>
-              <a:rPr lang="en-US" sz="1500" b="1" i="0" dirty="0">
+              <a:rPr lang="en-US" sz="1700" b="1" i="0" dirty="0">
                 <a:solidFill>
                   <a:srgbClr val="5C4826"/>
                 </a:solidFill>
@@ -10163,7 +10163,7 @@
               <a:buNone/>
             </a:pPr>
             <a:r>
-              <a:rPr lang="en-US" sz="1400" b="0" i="0" dirty="0">
+              <a:rPr lang="en-US" sz="1600" b="0" i="0" dirty="0">
                 <a:solidFill>
                   <a:srgbClr val="555960"/>
                 </a:solidFill>
@@ -10204,7 +10204,7 @@
               <a:buNone/>
             </a:pPr>
             <a:r>
-              <a:rPr lang="en-US" sz="1400" b="0" i="0" dirty="0">
+              <a:rPr lang="en-US" sz="1600" b="0" i="0" dirty="0">
                 <a:solidFill>
                   <a:srgbClr val="555960"/>
                 </a:solidFill>
@@ -10245,7 +10245,7 @@
               <a:buNone/>
             </a:pPr>
             <a:r>
-              <a:rPr lang="en-US" sz="1400" b="0" i="0" dirty="0">
+              <a:rPr lang="en-US" sz="1600" b="0" i="0" dirty="0">
                 <a:solidFill>
                   <a:srgbClr val="555960"/>
                 </a:solidFill>
@@ -10286,7 +10286,7 @@
               <a:buNone/>
             </a:pPr>
             <a:r>
-              <a:rPr lang="en-US" sz="1400" b="0" i="0" dirty="0">
+              <a:rPr lang="en-US" sz="1600" b="0" i="0" dirty="0">
                 <a:solidFill>
                   <a:srgbClr val="555960"/>
                 </a:solidFill>
@@ -10327,7 +10327,7 @@
               <a:buNone/>
             </a:pPr>
             <a:r>
-              <a:rPr lang="en-US" sz="1400" b="0" i="0" dirty="0">
+              <a:rPr lang="en-US" sz="1600" b="0" i="0" dirty="0">
                 <a:solidFill>
                   <a:srgbClr val="555960"/>
                 </a:solidFill>
@@ -10368,7 +10368,7 @@
               <a:buNone/>
             </a:pPr>
             <a:r>
-              <a:rPr lang="en-US" sz="1400" b="0" i="0" dirty="0">
+              <a:rPr lang="en-US" sz="1600" b="0" i="0" dirty="0">
                 <a:solidFill>
                   <a:srgbClr val="555960"/>
                 </a:solidFill>
@@ -10605,7 +10605,7 @@
               <a:buNone/>
             </a:pPr>
             <a:r>
-              <a:rPr lang="en-US" sz="1500" b="1" i="0" dirty="0">
+              <a:rPr lang="en-US" sz="1700" b="1" i="0" dirty="0">
                 <a:solidFill>
                   <a:srgbClr val="FFFFFF"/>
                 </a:solidFill>
@@ -10646,7 +10646,7 @@
               <a:buNone/>
             </a:pPr>
             <a:r>
-              <a:rPr lang="en-US" sz="1300" b="0" i="0" dirty="0">
+              <a:rPr lang="en-US" sz="1500" b="0" i="0" dirty="0">
                 <a:solidFill>
                   <a:srgbClr val="555960"/>
                 </a:solidFill>
@@ -10685,7 +10685,7 @@
               <a:buNone/>
             </a:pPr>
             <a:r>
-              <a:rPr lang="en-US" sz="1500" b="1" i="0" dirty="0">
+              <a:rPr lang="en-US" sz="1700" b="1" i="0" dirty="0">
                 <a:solidFill>
                   <a:srgbClr val="FFFFFF"/>
                 </a:solidFill>
@@ -10726,7 +10726,7 @@
               <a:buNone/>
             </a:pPr>
             <a:r>
-              <a:rPr lang="en-US" sz="1300" b="0" i="0" dirty="0">
+              <a:rPr lang="en-US" sz="1500" b="0" i="0" dirty="0">
                 <a:solidFill>
                   <a:srgbClr val="555960"/>
                 </a:solidFill>
@@ -10765,7 +10765,7 @@
               <a:buNone/>
             </a:pPr>
             <a:r>
-              <a:rPr lang="en-US" sz="1500" b="1" i="0" dirty="0">
+              <a:rPr lang="en-US" sz="1700" b="1" i="0" dirty="0">
                 <a:solidFill>
                   <a:srgbClr val="FFFFFF"/>
                 </a:solidFill>
@@ -10806,7 +10806,7 @@
               <a:buNone/>
             </a:pPr>
             <a:r>
-              <a:rPr lang="en-US" sz="1300" b="0" i="0" dirty="0">
+              <a:rPr lang="en-US" sz="1500" b="0" i="0" dirty="0">
                 <a:solidFill>
                   <a:srgbClr val="555960"/>
                 </a:solidFill>
@@ -11775,7 +11775,7 @@
         </p:nvSpPr>
         <p:spPr>
           <a:xfrm>
-            <a:off x="731520" y="2194560"/>
+            <a:off x="960120" y="2194560"/>
             <a:ext cx="2377440" cy="777240"/>
           </a:xfrm>
           <a:prstGeom prst="rect">
@@ -11816,7 +11816,7 @@
         </p:nvSpPr>
         <p:spPr>
           <a:xfrm>
-            <a:off x="4754880" y="1005840"/>
+            <a:off x="4983480" y="1005840"/>
             <a:ext cx="3200400" cy="548640"/>
           </a:xfrm>
           <a:prstGeom prst="rect">
@@ -11857,7 +11857,7 @@
         </p:nvCxnSpPr>
         <p:spPr>
           <a:xfrm flipV="1">
-            <a:off x="3108960" y="1280160"/>
+            <a:off x="3337560" y="1280160"/>
             <a:ext cx="1645920" cy="1298448"/>
           </a:xfrm>
           <a:prstGeom prst="straightConnector1">
@@ -11878,7 +11878,7 @@
         </p:nvSpPr>
         <p:spPr>
           <a:xfrm>
-            <a:off x="4754880" y="1627632"/>
+            <a:off x="4983480" y="1627632"/>
             <a:ext cx="3200400" cy="548640"/>
           </a:xfrm>
           <a:prstGeom prst="rect">
@@ -11919,7 +11919,7 @@
         </p:nvCxnSpPr>
         <p:spPr>
           <a:xfrm flipV="1">
-            <a:off x="3108960" y="1901952"/>
+            <a:off x="3337560" y="1901952"/>
             <a:ext cx="1645920" cy="676656"/>
           </a:xfrm>
           <a:prstGeom prst="straightConnector1">
@@ -11940,7 +11940,7 @@
         </p:nvSpPr>
         <p:spPr>
           <a:xfrm>
-            <a:off x="4754880" y="2249424"/>
+            <a:off x="4983480" y="2249424"/>
             <a:ext cx="3200400" cy="548640"/>
           </a:xfrm>
           <a:prstGeom prst="rect">
@@ -11981,7 +11981,7 @@
         </p:nvCxnSpPr>
         <p:spPr>
           <a:xfrm flipV="1">
-            <a:off x="3108960" y="2523744"/>
+            <a:off x="3337560" y="2523744"/>
             <a:ext cx="1645920" cy="54864"/>
           </a:xfrm>
           <a:prstGeom prst="straightConnector1">
@@ -12002,7 +12002,7 @@
         </p:nvSpPr>
         <p:spPr>
           <a:xfrm>
-            <a:off x="4754880" y="2871216"/>
+            <a:off x="4983480" y="2871216"/>
             <a:ext cx="3200400" cy="548640"/>
           </a:xfrm>
           <a:prstGeom prst="rect">
@@ -12043,7 +12043,7 @@
         </p:nvCxnSpPr>
         <p:spPr>
           <a:xfrm>
-            <a:off x="3108960" y="2578608"/>
+            <a:off x="3337560" y="2578608"/>
             <a:ext cx="1645920" cy="566928"/>
           </a:xfrm>
           <a:prstGeom prst="straightConnector1">
@@ -12064,7 +12064,7 @@
         </p:nvSpPr>
         <p:spPr>
           <a:xfrm>
-            <a:off x="4754880" y="3493008"/>
+            <a:off x="4983480" y="3493008"/>
             <a:ext cx="3200400" cy="548640"/>
           </a:xfrm>
           <a:prstGeom prst="rect">
@@ -12105,7 +12105,7 @@
         </p:nvCxnSpPr>
         <p:spPr>
           <a:xfrm>
-            <a:off x="3108960" y="2578608"/>
+            <a:off x="3337560" y="2578608"/>
             <a:ext cx="1645920" cy="1188720"/>
           </a:xfrm>
           <a:prstGeom prst="straightConnector1">
@@ -12126,7 +12126,7 @@
         </p:nvSpPr>
         <p:spPr>
           <a:xfrm>
-            <a:off x="4754880" y="4114800"/>
+            <a:off x="4983480" y="4114800"/>
             <a:ext cx="3200400" cy="548640"/>
           </a:xfrm>
           <a:prstGeom prst="rect">
@@ -12167,7 +12167,7 @@
         </p:nvCxnSpPr>
         <p:spPr>
           <a:xfrm>
-            <a:off x="3108960" y="2578608"/>
+            <a:off x="3337560" y="2578608"/>
             <a:ext cx="1645920" cy="1810512"/>
           </a:xfrm>
           <a:prstGeom prst="straightConnector1">
@@ -12444,7 +12444,7 @@
               <a:buNone/>
             </a:pPr>
             <a:r>
-              <a:rPr lang="en-US" sz="1600" b="1" i="0" dirty="0">
+              <a:rPr lang="en-US" sz="1800" b="1" i="0" dirty="0">
                 <a:solidFill>
                   <a:srgbClr val="5C4826"/>
                 </a:solidFill>
@@ -12460,7 +12460,7 @@
               <a:buNone/>
             </a:pPr>
             <a:r>
-              <a:rPr lang="en-US" sz="1400" b="0" i="0" dirty="0">
+              <a:rPr lang="en-US" sz="1600" b="0" i="0" dirty="0">
                 <a:solidFill>
                   <a:srgbClr val="555960"/>
                 </a:solidFill>
@@ -12523,7 +12523,7 @@
               <a:buNone/>
             </a:pPr>
             <a:r>
-              <a:rPr lang="en-US" sz="1600" b="1" i="0" dirty="0">
+              <a:rPr lang="en-US" sz="1800" b="1" i="0" dirty="0">
                 <a:solidFill>
                   <a:srgbClr val="5C4826"/>
                 </a:solidFill>
@@ -12539,7 +12539,7 @@
               <a:buNone/>
             </a:pPr>
             <a:r>
-              <a:rPr lang="en-US" sz="1400" b="0" i="0" dirty="0">
+              <a:rPr lang="en-US" sz="1600" b="0" i="0" dirty="0">
                 <a:solidFill>
                   <a:srgbClr val="555960"/>
                 </a:solidFill>
@@ -12659,7 +12659,7 @@
               <a:buNone/>
             </a:pPr>
             <a:r>
-              <a:rPr lang="en-US" sz="1200" b="0" i="0" dirty="0">
+              <a:rPr lang="en-US" sz="1400" b="0" i="0" dirty="0">
                 <a:solidFill>
                   <a:srgbClr val="555960"/>
                 </a:solidFill>
@@ -12700,7 +12700,7 @@
               <a:buNone/>
             </a:pPr>
             <a:r>
-              <a:rPr lang="en-US" sz="1600" b="1" i="0" dirty="0">
+              <a:rPr lang="en-US" sz="1800" b="1" i="0" dirty="0">
                 <a:solidFill>
                   <a:srgbClr val="5C4826"/>
                 </a:solidFill>
@@ -12716,7 +12716,7 @@
               <a:buNone/>
             </a:pPr>
             <a:r>
-              <a:rPr lang="en-US" sz="1400" b="0" i="0" dirty="0">
+              <a:rPr lang="en-US" sz="1600" b="0" i="0" dirty="0">
                 <a:solidFill>
                   <a:srgbClr val="555960"/>
                 </a:solidFill>
@@ -12757,7 +12757,7 @@
               <a:buNone/>
             </a:pPr>
             <a:r>
-              <a:rPr lang="en-US" sz="1400" b="1" i="0" dirty="0">
+              <a:rPr lang="en-US" sz="1600" b="1" i="0" dirty="0">
                 <a:solidFill>
                   <a:srgbClr val="8E6F3E"/>
                 </a:solidFill>
@@ -12773,7 +12773,7 @@
               <a:buNone/>
             </a:pPr>
             <a:r>
-              <a:rPr lang="en-US" sz="1400" b="0" i="0" dirty="0">
+              <a:rPr lang="en-US" sz="1600" b="0" i="0" dirty="0">
                 <a:solidFill>
                   <a:srgbClr val="555960"/>
                 </a:solidFill>
@@ -12814,7 +12814,7 @@
               <a:buNone/>
             </a:pPr>
             <a:r>
-              <a:rPr lang="en-US" sz="1400" b="1" i="0" dirty="0">
+              <a:rPr lang="en-US" sz="1600" b="1" i="0" dirty="0">
                 <a:solidFill>
                   <a:srgbClr val="8E6F3E"/>
                 </a:solidFill>
@@ -12830,7 +12830,7 @@
               <a:buNone/>
             </a:pPr>
             <a:r>
-              <a:rPr lang="en-US" sz="1400" b="0" i="0" dirty="0">
+              <a:rPr lang="en-US" sz="1600" b="0" i="0" dirty="0">
                 <a:solidFill>
                   <a:srgbClr val="555960"/>
                 </a:solidFill>
@@ -12871,7 +12871,7 @@
               <a:buNone/>
             </a:pPr>
             <a:r>
-              <a:rPr lang="en-US" sz="1400" b="1" i="0" dirty="0">
+              <a:rPr lang="en-US" sz="1600" b="1" i="0" dirty="0">
                 <a:solidFill>
                   <a:srgbClr val="8E6F3E"/>
                 </a:solidFill>
@@ -12887,7 +12887,7 @@
               <a:buNone/>
             </a:pPr>
             <a:r>
-              <a:rPr lang="en-US" sz="1400" b="0" i="0" dirty="0">
+              <a:rPr lang="en-US" sz="1600" b="0" i="0" dirty="0">
                 <a:solidFill>
                   <a:srgbClr val="555960"/>
                 </a:solidFill>
@@ -12924,7 +12924,7 @@
               <a:buNone/>
             </a:pPr>
             <a:r>
-              <a:rPr lang="en-US" sz="1200" b="0" i="0" dirty="0">
+              <a:rPr lang="en-US" sz="1400" b="0" i="0" dirty="0">
                 <a:solidFill>
                   <a:srgbClr val="555960"/>
                 </a:solidFill>
@@ -14047,7 +14047,7 @@
         </p:nvSpPr>
         <p:spPr>
           <a:xfrm>
-            <a:off x="365760" y="1850516"/>
+            <a:off x="365760" y="1645920"/>
             <a:ext cx="6080760" cy="393192"/>
           </a:xfrm>
           <a:prstGeom prst="rect">
@@ -14085,8 +14085,8 @@
         </p:nvSpPr>
         <p:spPr>
           <a:xfrm>
-            <a:off x="365760" y="2240280"/>
-            <a:ext cx="6080760" cy="1554480"/>
+            <a:off x="365760" y="2048256"/>
+            <a:ext cx="6080760" cy="1755648"/>
           </a:xfrm>
           <a:prstGeom prst="rect">
             <a:avLst/>
@@ -14115,12 +14115,12 @@
           </a:fontRef>
         </p:style>
         <p:txBody>
-          <a:bodyPr wrap="square" lIns="128016" tIns="91440" rIns="118872" rtlCol="0" anchor="ctr"/>
+          <a:bodyPr wrap="square" lIns="128016" tIns="91440" rIns="118872" bIns="91440" rtlCol="0" anchor="ctr"/>
           <a:lstStyle/>
           <a:p>
             <a:pPr algn="l">
               <a:spcAft>
-                <a:spcPts val="700"/>
+                <a:spcPts val="400"/>
               </a:spcAft>
             </a:pPr>
             <a:r>
@@ -14135,7 +14135,7 @@
           <a:p>
             <a:pPr algn="l">
               <a:spcAft>
-                <a:spcPts val="700"/>
+                <a:spcPts val="400"/>
               </a:spcAft>
             </a:pPr>
             <a:r>
@@ -14172,7 +14172,7 @@
         </p:nvSpPr>
         <p:spPr>
           <a:xfrm>
-            <a:off x="365760" y="3886200"/>
+            <a:off x="365760" y="3895344"/>
             <a:ext cx="6080760" cy="393192"/>
           </a:xfrm>
           <a:prstGeom prst="rect">
@@ -14210,8 +14210,8 @@
         </p:nvSpPr>
         <p:spPr>
           <a:xfrm>
-            <a:off x="365760" y="4279392"/>
-            <a:ext cx="6080760" cy="1417320"/>
+            <a:off x="365760" y="4306824"/>
+            <a:ext cx="6080760" cy="1481328"/>
           </a:xfrm>
           <a:prstGeom prst="rect">
             <a:avLst/>
@@ -14240,12 +14240,12 @@
           </a:fontRef>
         </p:style>
         <p:txBody>
-          <a:bodyPr wrap="square" lIns="128016" tIns="91440" rIns="118872" rtlCol="0" anchor="ctr"/>
+          <a:bodyPr wrap="square" lIns="128016" tIns="91440" rIns="118872" bIns="91440" rtlCol="0" anchor="ctr"/>
           <a:lstStyle/>
           <a:p>
             <a:pPr algn="l">
               <a:spcAft>
-                <a:spcPts val="700"/>
+                <a:spcPts val="400"/>
               </a:spcAft>
             </a:pPr>
             <a:r>
@@ -14260,7 +14260,7 @@
           <a:p>
             <a:pPr algn="l">
               <a:spcAft>
-                <a:spcPts val="700"/>
+                <a:spcPts val="400"/>
               </a:spcAft>
             </a:pPr>
             <a:r>
@@ -14427,14 +14427,6 @@
                 </a:solidFill>
               </a:rPr>
               <a:t>Discuss the questions. Then submit one response per team.</a:t>
-            </a:r>
-            <a:r>
-              <a:rPr sz="2000" b="1" dirty="0">
-                <a:solidFill>
-                  <a:srgbClr val="FFFFFF"/>
-                </a:solidFill>
-              </a:rPr>
-              <a:t>hen submit one response per team.</a:t>
             </a:r>
           </a:p>
         </p:txBody>
@@ -15786,7 +15778,7 @@
         <p:spPr>
           <a:xfrm>
             <a:off x="822960" y="4443984"/>
-            <a:ext cx="1408176" cy="603504"/>
+            <a:ext cx="1481328" cy="640080"/>
           </a:xfrm>
           <a:prstGeom prst="rect">
             <a:avLst/>
@@ -15808,7 +15800,7 @@
               <a:buNone/>
             </a:pPr>
             <a:r>
-              <a:rPr lang="en-US" sz="1500" b="1" i="0" dirty="0">
+              <a:rPr lang="en-US" sz="1700" b="1" i="0" dirty="0">
                 <a:solidFill>
                   <a:srgbClr val="5C4826"/>
                 </a:solidFill>
@@ -15824,7 +15816,7 @@
               <a:buNone/>
             </a:pPr>
             <a:r>
-              <a:rPr lang="en-US" sz="1500" b="1" i="0" dirty="0">
+              <a:rPr lang="en-US" sz="1700" b="1" i="0" dirty="0">
                 <a:solidFill>
                   <a:srgbClr val="5C4826"/>
                 </a:solidFill>
@@ -15843,7 +15835,7 @@
         <p:spPr>
           <a:xfrm>
             <a:off x="2450592" y="3803904"/>
-            <a:ext cx="1408176" cy="603504"/>
+            <a:ext cx="1481328" cy="640080"/>
           </a:xfrm>
           <a:prstGeom prst="rect">
             <a:avLst/>
@@ -15865,7 +15857,7 @@
               <a:buNone/>
             </a:pPr>
             <a:r>
-              <a:rPr lang="en-US" sz="1500" b="1" i="0" dirty="0">
+              <a:rPr lang="en-US" sz="1700" b="1" i="0" dirty="0">
                 <a:solidFill>
                   <a:srgbClr val="5C4826"/>
                 </a:solidFill>
@@ -15881,7 +15873,7 @@
               <a:buNone/>
             </a:pPr>
             <a:r>
-              <a:rPr lang="en-US" sz="1500" b="1" i="0" dirty="0">
+              <a:rPr lang="en-US" sz="1700" b="1" i="0" dirty="0">
                 <a:solidFill>
                   <a:srgbClr val="5C4826"/>
                 </a:solidFill>
@@ -15900,7 +15892,7 @@
         <p:spPr>
           <a:xfrm>
             <a:off x="4078224" y="3163824"/>
-            <a:ext cx="1408176" cy="603504"/>
+            <a:ext cx="1481328" cy="640080"/>
           </a:xfrm>
           <a:prstGeom prst="rect">
             <a:avLst/>
@@ -15922,7 +15914,7 @@
               <a:buNone/>
             </a:pPr>
             <a:r>
-              <a:rPr lang="en-US" sz="1500" b="1" i="0" dirty="0">
+              <a:rPr lang="en-US" sz="1700" b="1" i="0" dirty="0">
                 <a:solidFill>
                   <a:srgbClr val="5C4826"/>
                 </a:solidFill>
@@ -15938,7 +15930,7 @@
               <a:buNone/>
             </a:pPr>
             <a:r>
-              <a:rPr lang="en-US" sz="1500" b="1" i="0" dirty="0">
+              <a:rPr lang="en-US" sz="1700" b="1" i="0" dirty="0">
                 <a:solidFill>
                   <a:srgbClr val="5C4826"/>
                 </a:solidFill>
@@ -15957,7 +15949,7 @@
         <p:spPr>
           <a:xfrm>
             <a:off x="5705856" y="2523744"/>
-            <a:ext cx="1408176" cy="603504"/>
+            <a:ext cx="1481328" cy="640080"/>
           </a:xfrm>
           <a:prstGeom prst="rect">
             <a:avLst/>
@@ -15979,7 +15971,7 @@
               <a:buNone/>
             </a:pPr>
             <a:r>
-              <a:rPr lang="en-US" sz="1500" b="1" i="0" dirty="0">
+              <a:rPr lang="en-US" sz="1700" b="1" i="0" dirty="0">
                 <a:solidFill>
                   <a:srgbClr val="5C4826"/>
                 </a:solidFill>
@@ -15998,7 +15990,7 @@
         <p:spPr>
           <a:xfrm>
             <a:off x="7333488" y="1883664"/>
-            <a:ext cx="1408176" cy="603504"/>
+            <a:ext cx="1481328" cy="640080"/>
           </a:xfrm>
           <a:prstGeom prst="rect">
             <a:avLst/>
@@ -16018,7 +16010,7 @@
               <a:buNone/>
             </a:pPr>
             <a:r>
-              <a:rPr lang="en-US" sz="1500" b="1" i="0" dirty="0">
+              <a:rPr lang="en-US" sz="1700" b="1" i="0" dirty="0">
                 <a:solidFill>
                   <a:srgbClr val="FFFFFF"/>
                 </a:solidFill>
@@ -16034,7 +16026,7 @@
               <a:buNone/>
             </a:pPr>
             <a:r>
-              <a:rPr lang="en-US" sz="1500" b="1" i="0" dirty="0">
+              <a:rPr lang="en-US" sz="1700" b="1" i="0" dirty="0">
                 <a:solidFill>
                   <a:srgbClr val="FFFFFF"/>
                 </a:solidFill>
@@ -16641,7 +16633,7 @@
               <a:buNone/>
             </a:pPr>
             <a:r>
-              <a:rPr lang="en-US" sz="1600" b="0" i="0" dirty="0">
+              <a:rPr lang="en-US" sz="1700" b="0" i="0" dirty="0">
                 <a:solidFill>
                   <a:srgbClr val="555960"/>
                 </a:solidFill>
@@ -16657,7 +16649,7 @@
               <a:buNone/>
             </a:pPr>
             <a:r>
-              <a:rPr lang="en-US" sz="1600" b="0" i="0" dirty="0">
+              <a:rPr lang="en-US" sz="1700" b="0" i="0" dirty="0">
                 <a:solidFill>
                   <a:srgbClr val="555960"/>
                 </a:solidFill>
@@ -16698,7 +16690,7 @@
               <a:buNone/>
             </a:pPr>
             <a:r>
-              <a:rPr lang="en-US" sz="1600" b="0" i="0" dirty="0">
+              <a:rPr lang="en-US" sz="1700" b="0" i="0" dirty="0">
                 <a:solidFill>
                   <a:srgbClr val="555960"/>
                 </a:solidFill>
@@ -16714,7 +16706,7 @@
               <a:buNone/>
             </a:pPr>
             <a:r>
-              <a:rPr lang="en-US" sz="1600" b="0" i="0" dirty="0">
+              <a:rPr lang="en-US" sz="1700" b="0" i="0" dirty="0">
                 <a:solidFill>
                   <a:srgbClr val="555960"/>
                 </a:solidFill>
@@ -16755,7 +16747,7 @@
               <a:buNone/>
             </a:pPr>
             <a:r>
-              <a:rPr lang="en-US" sz="1600" b="0" i="0" dirty="0">
+              <a:rPr lang="en-US" sz="1700" b="0" i="0" dirty="0">
                 <a:solidFill>
                   <a:srgbClr val="555960"/>
                 </a:solidFill>
@@ -16771,7 +16763,7 @@
               <a:buNone/>
             </a:pPr>
             <a:r>
-              <a:rPr lang="en-US" sz="1600" b="0" i="0" dirty="0">
+              <a:rPr lang="en-US" sz="1700" b="0" i="0" dirty="0">
                 <a:solidFill>
                   <a:srgbClr val="555960"/>
                 </a:solidFill>
@@ -16812,7 +16804,7 @@
               <a:buNone/>
             </a:pPr>
             <a:r>
-              <a:rPr lang="en-US" sz="1600" b="0" i="0" dirty="0">
+              <a:rPr lang="en-US" sz="1700" b="0" i="0" dirty="0">
                 <a:solidFill>
                   <a:srgbClr val="555960"/>
                 </a:solidFill>
@@ -16828,7 +16820,7 @@
               <a:buNone/>
             </a:pPr>
             <a:r>
-              <a:rPr lang="en-US" sz="1600" b="0" i="0" dirty="0">
+              <a:rPr lang="en-US" sz="1700" b="0" i="0" dirty="0">
                 <a:solidFill>
                   <a:srgbClr val="555960"/>
                 </a:solidFill>
@@ -16869,7 +16861,7 @@
               <a:buNone/>
             </a:pPr>
             <a:r>
-              <a:rPr lang="en-US" sz="1600" b="0" i="0" dirty="0">
+              <a:rPr lang="en-US" sz="1700" b="0" i="0" dirty="0">
                 <a:solidFill>
                   <a:srgbClr val="555960"/>
                 </a:solidFill>
@@ -18768,7 +18760,7 @@
             <a:r>
               <a:rPr lang="en-US" sz="1400" b="1" i="0" dirty="0">
                 <a:solidFill>
-                  <a:srgbClr val="8E6F3E"/>
+                  <a:srgbClr val="5C4826"/>
                 </a:solidFill>
               </a:rPr>
               <a:t>PERSON OR AGENT</a:t>
@@ -19569,7 +19561,7 @@
               <a:buNone/>
             </a:pPr>
             <a:r>
-              <a:rPr lang="en-US" sz="1800" b="1" i="0" dirty="0">
+              <a:rPr lang="en-US" sz="2000" b="1" i="0" dirty="0">
                 <a:solidFill>
                   <a:srgbClr val="FFFFFF"/>
                 </a:solidFill>
@@ -19610,7 +19602,7 @@
               <a:buNone/>
             </a:pPr>
             <a:r>
-              <a:rPr lang="en-US" sz="1600" b="0" i="0" dirty="0">
+              <a:rPr lang="en-US" sz="1800" b="0" i="0" dirty="0">
                 <a:solidFill>
                   <a:srgbClr val="555960"/>
                 </a:solidFill>
@@ -19673,7 +19665,7 @@
               <a:buNone/>
             </a:pPr>
             <a:r>
-              <a:rPr lang="en-US" sz="1600" b="1" i="0" dirty="0">
+              <a:rPr lang="en-US" sz="1800" b="1" i="0" dirty="0">
                 <a:solidFill>
                   <a:srgbClr val="5C4826"/>
                 </a:solidFill>
@@ -19712,7 +19704,7 @@
               <a:buNone/>
             </a:pPr>
             <a:r>
-              <a:rPr lang="en-US" sz="1800" b="1" i="0" dirty="0">
+              <a:rPr lang="en-US" sz="2000" b="1" i="0" dirty="0">
                 <a:solidFill>
                   <a:srgbClr val="FFFFFF"/>
                 </a:solidFill>
@@ -19753,7 +19745,7 @@
               <a:buNone/>
             </a:pPr>
             <a:r>
-              <a:rPr lang="en-US" sz="1600" b="0" i="0" dirty="0">
+              <a:rPr lang="en-US" sz="1800" b="0" i="0" dirty="0">
                 <a:solidFill>
                   <a:srgbClr val="555960"/>
                 </a:solidFill>
@@ -19816,7 +19808,7 @@
               <a:buNone/>
             </a:pPr>
             <a:r>
-              <a:rPr lang="en-US" sz="1600" b="1" i="0" dirty="0">
+              <a:rPr lang="en-US" sz="1800" b="1" i="0" dirty="0">
                 <a:solidFill>
                   <a:srgbClr val="5C4826"/>
                 </a:solidFill>
@@ -19855,7 +19847,7 @@
               <a:buNone/>
             </a:pPr>
             <a:r>
-              <a:rPr lang="en-US" sz="1800" b="1" i="0" dirty="0">
+              <a:rPr lang="en-US" sz="2000" b="1" i="0" dirty="0">
                 <a:solidFill>
                   <a:srgbClr val="FFFFFF"/>
                 </a:solidFill>
@@ -19896,7 +19888,7 @@
               <a:buNone/>
             </a:pPr>
             <a:r>
-              <a:rPr lang="en-US" sz="1600" b="0" i="0" dirty="0">
+              <a:rPr lang="en-US" sz="1800" b="0" i="0" dirty="0">
                 <a:solidFill>
                   <a:srgbClr val="555960"/>
                 </a:solidFill>
@@ -19959,7 +19951,7 @@
               <a:buNone/>
             </a:pPr>
             <a:r>
-              <a:rPr lang="en-US" sz="1600" b="1" i="0" dirty="0">
+              <a:rPr lang="en-US" sz="1800" b="1" i="0" dirty="0">
                 <a:solidFill>
                   <a:srgbClr val="5C4826"/>
                 </a:solidFill>
@@ -23653,8 +23645,8 @@
         </p:nvSpPr>
         <p:spPr>
           <a:xfrm>
-            <a:off x="274320" y="1755648"/>
-            <a:ext cx="1938528" cy="548640"/>
+            <a:off x="722376" y="1755648"/>
+            <a:ext cx="1700784" cy="548640"/>
           </a:xfrm>
           <a:prstGeom prst="rect">
             <a:avLst/>
@@ -23694,8 +23686,8 @@
         </p:nvSpPr>
         <p:spPr>
           <a:xfrm>
-            <a:off x="274320" y="2304288"/>
-            <a:ext cx="1938528" cy="585216"/>
+            <a:off x="722376" y="2304288"/>
+            <a:ext cx="1700784" cy="585216"/>
           </a:xfrm>
           <a:prstGeom prst="rect">
             <a:avLst/>
@@ -23735,8 +23727,8 @@
         </p:nvSpPr>
         <p:spPr>
           <a:xfrm>
-            <a:off x="2493294" y="1755648"/>
-            <a:ext cx="1938528" cy="548640"/>
+            <a:off x="2724912" y="1755648"/>
+            <a:ext cx="1700784" cy="548640"/>
           </a:xfrm>
           <a:prstGeom prst="rect">
             <a:avLst/>
@@ -23776,8 +23768,8 @@
         </p:nvSpPr>
         <p:spPr>
           <a:xfrm>
-            <a:off x="2493294" y="2304288"/>
-            <a:ext cx="1938528" cy="585216"/>
+            <a:off x="2724912" y="2304288"/>
+            <a:ext cx="1700784" cy="585216"/>
           </a:xfrm>
           <a:prstGeom prst="rect">
             <a:avLst/>
@@ -23817,8 +23809,8 @@
         </p:nvSpPr>
         <p:spPr>
           <a:xfrm>
-            <a:off x="4712269" y="1755648"/>
-            <a:ext cx="1938528" cy="548640"/>
+            <a:off x="4727448" y="1755648"/>
+            <a:ext cx="1700784" cy="548640"/>
           </a:xfrm>
           <a:prstGeom prst="rect">
             <a:avLst/>
@@ -23858,8 +23850,8 @@
         </p:nvSpPr>
         <p:spPr>
           <a:xfrm>
-            <a:off x="4712269" y="2304288"/>
-            <a:ext cx="1938528" cy="585216"/>
+            <a:off x="4727448" y="2304288"/>
+            <a:ext cx="1700784" cy="585216"/>
           </a:xfrm>
           <a:prstGeom prst="rect">
             <a:avLst/>
@@ -23899,8 +23891,8 @@
         </p:nvSpPr>
         <p:spPr>
           <a:xfrm>
-            <a:off x="6931243" y="1755648"/>
-            <a:ext cx="1938528" cy="548640"/>
+            <a:off x="6729984" y="1755648"/>
+            <a:ext cx="1700784" cy="548640"/>
           </a:xfrm>
           <a:prstGeom prst="rect">
             <a:avLst/>
@@ -23940,8 +23932,8 @@
         </p:nvSpPr>
         <p:spPr>
           <a:xfrm>
-            <a:off x="6931243" y="2304288"/>
-            <a:ext cx="1938528" cy="585216"/>
+            <a:off x="6729984" y="2304288"/>
+            <a:ext cx="1700784" cy="585216"/>
           </a:xfrm>
           <a:prstGeom prst="rect">
             <a:avLst/>
@@ -25286,7 +25278,7 @@
               <a:buNone/>
             </a:pPr>
             <a:r>
-              <a:rPr lang="en-US" sz="1400" b="1" i="0" dirty="0">
+              <a:rPr lang="en-US" sz="1600" b="1" i="0" dirty="0">
                 <a:solidFill>
                   <a:srgbClr val="FFFFFF"/>
                 </a:solidFill>
@@ -25325,7 +25317,7 @@
               <a:buNone/>
             </a:pPr>
             <a:r>
-              <a:rPr lang="en-US" sz="1400" b="1" i="0" dirty="0">
+              <a:rPr lang="en-US" sz="1600" b="1" i="0" dirty="0">
                 <a:solidFill>
                   <a:srgbClr val="FFFFFF"/>
                 </a:solidFill>
@@ -25364,7 +25356,7 @@
               <a:buNone/>
             </a:pPr>
             <a:r>
-              <a:rPr lang="en-US" sz="1400" b="1" i="0" dirty="0">
+              <a:rPr lang="en-US" sz="1600" b="1" i="0" dirty="0">
                 <a:solidFill>
                   <a:srgbClr val="FFFFFF"/>
                 </a:solidFill>
@@ -25405,7 +25397,7 @@
               <a:buNone/>
             </a:pPr>
             <a:r>
-              <a:rPr lang="en-US" sz="1400" b="1" i="0" dirty="0">
+              <a:rPr lang="en-US" sz="1600" b="1" i="0" dirty="0">
                 <a:solidFill>
                   <a:srgbClr val="5C4826"/>
                 </a:solidFill>
@@ -25446,7 +25438,7 @@
               <a:buNone/>
             </a:pPr>
             <a:r>
-              <a:rPr lang="en-US" sz="1300" b="0" i="0" dirty="0">
+              <a:rPr lang="en-US" sz="1500" b="0" i="0" dirty="0">
                 <a:solidFill>
                   <a:srgbClr val="555960"/>
                 </a:solidFill>
@@ -25487,7 +25479,7 @@
               <a:buNone/>
             </a:pPr>
             <a:r>
-              <a:rPr lang="en-US" sz="1300" b="0" i="0" dirty="0">
+              <a:rPr lang="en-US" sz="1500" b="0" i="0" dirty="0">
                 <a:solidFill>
                   <a:srgbClr val="555960"/>
                 </a:solidFill>
@@ -25528,7 +25520,7 @@
               <a:buNone/>
             </a:pPr>
             <a:r>
-              <a:rPr lang="en-US" sz="1300" b="0" i="0" dirty="0">
+              <a:rPr lang="en-US" sz="1500" b="0" i="0" dirty="0">
                 <a:solidFill>
                   <a:srgbClr val="555960"/>
                 </a:solidFill>
@@ -25569,7 +25561,7 @@
               <a:buNone/>
             </a:pPr>
             <a:r>
-              <a:rPr lang="en-US" sz="1400" b="1" i="0" dirty="0">
+              <a:rPr lang="en-US" sz="1600" b="1" i="0" dirty="0">
                 <a:solidFill>
                   <a:srgbClr val="5C4826"/>
                 </a:solidFill>
@@ -25610,7 +25602,7 @@
               <a:buNone/>
             </a:pPr>
             <a:r>
-              <a:rPr lang="en-US" sz="1300" b="0" i="0" dirty="0">
+              <a:rPr lang="en-US" sz="1500" b="0" i="0" dirty="0">
                 <a:solidFill>
                   <a:srgbClr val="555960"/>
                 </a:solidFill>
@@ -25651,7 +25643,7 @@
               <a:buNone/>
             </a:pPr>
             <a:r>
-              <a:rPr lang="en-US" sz="1300" b="0" i="0" dirty="0">
+              <a:rPr lang="en-US" sz="1500" b="0" i="0" dirty="0">
                 <a:solidFill>
                   <a:srgbClr val="555960"/>
                 </a:solidFill>
@@ -25692,7 +25684,7 @@
               <a:buNone/>
             </a:pPr>
             <a:r>
-              <a:rPr lang="en-US" sz="1300" b="0" i="0" dirty="0">
+              <a:rPr lang="en-US" sz="1500" b="0" i="0" dirty="0">
                 <a:solidFill>
                   <a:srgbClr val="555960"/>
                 </a:solidFill>
@@ -25733,7 +25725,7 @@
               <a:buNone/>
             </a:pPr>
             <a:r>
-              <a:rPr lang="en-US" sz="1400" b="1" i="0" dirty="0">
+              <a:rPr lang="en-US" sz="1600" b="1" i="0" dirty="0">
                 <a:solidFill>
                   <a:srgbClr val="5C4826"/>
                 </a:solidFill>
@@ -25774,7 +25766,7 @@
               <a:buNone/>
             </a:pPr>
             <a:r>
-              <a:rPr lang="en-US" sz="1300" b="0" i="0" dirty="0">
+              <a:rPr lang="en-US" sz="1500" b="0" i="0" dirty="0">
                 <a:solidFill>
                   <a:srgbClr val="555960"/>
                 </a:solidFill>
@@ -25815,7 +25807,7 @@
               <a:buNone/>
             </a:pPr>
             <a:r>
-              <a:rPr lang="en-US" sz="1300" b="0" i="0" dirty="0">
+              <a:rPr lang="en-US" sz="1500" b="0" i="0" dirty="0">
                 <a:solidFill>
                   <a:srgbClr val="555960"/>
                 </a:solidFill>
@@ -25856,7 +25848,7 @@
               <a:buNone/>
             </a:pPr>
             <a:r>
-              <a:rPr lang="en-US" sz="1300" b="0" i="0" dirty="0">
+              <a:rPr lang="en-US" sz="1500" b="0" i="0" dirty="0">
                 <a:solidFill>
                   <a:srgbClr val="555960"/>
                 </a:solidFill>
@@ -25872,7 +25864,7 @@
               <a:buNone/>
             </a:pPr>
             <a:r>
-              <a:rPr lang="en-US" sz="1300" b="0" i="0" dirty="0">
+              <a:rPr lang="en-US" sz="1500" b="0" i="0" dirty="0">
                 <a:solidFill>
                   <a:srgbClr val="555960"/>
                 </a:solidFill>
@@ -25913,7 +25905,7 @@
               <a:buNone/>
             </a:pPr>
             <a:r>
-              <a:rPr lang="en-US" sz="1400" b="1" i="0" dirty="0">
+              <a:rPr lang="en-US" sz="1600" b="1" i="0" dirty="0">
                 <a:solidFill>
                   <a:srgbClr val="5C4826"/>
                 </a:solidFill>
@@ -25954,7 +25946,7 @@
               <a:buNone/>
             </a:pPr>
             <a:r>
-              <a:rPr lang="en-US" sz="1300" b="0" i="0" dirty="0">
+              <a:rPr lang="en-US" sz="1500" b="0" i="0" dirty="0">
                 <a:solidFill>
                   <a:srgbClr val="555960"/>
                 </a:solidFill>
@@ -25995,7 +25987,7 @@
               <a:buNone/>
             </a:pPr>
             <a:r>
-              <a:rPr lang="en-US" sz="1300" b="0" i="0" dirty="0">
+              <a:rPr lang="en-US" sz="1500" b="0" i="0" dirty="0">
                 <a:solidFill>
                   <a:srgbClr val="555960"/>
                 </a:solidFill>
@@ -26036,7 +26028,7 @@
               <a:buNone/>
             </a:pPr>
             <a:r>
-              <a:rPr lang="en-US" sz="1300" b="0" i="0" dirty="0">
+              <a:rPr lang="en-US" sz="1500" b="0" i="0" dirty="0">
                 <a:solidFill>
                   <a:srgbClr val="555960"/>
                 </a:solidFill>
@@ -26077,7 +26069,7 @@
               <a:buNone/>
             </a:pPr>
             <a:r>
-              <a:rPr lang="en-US" sz="1400" b="1" i="0" dirty="0">
+              <a:rPr lang="en-US" sz="1600" b="1" i="0" dirty="0">
                 <a:solidFill>
                   <a:srgbClr val="5C4826"/>
                 </a:solidFill>
@@ -26118,7 +26110,7 @@
               <a:buNone/>
             </a:pPr>
             <a:r>
-              <a:rPr lang="en-US" sz="1300" b="0" i="0" dirty="0">
+              <a:rPr lang="en-US" sz="1500" b="0" i="0" dirty="0">
                 <a:solidFill>
                   <a:srgbClr val="555960"/>
                 </a:solidFill>
@@ -26159,7 +26151,7 @@
               <a:buNone/>
             </a:pPr>
             <a:r>
-              <a:rPr lang="en-US" sz="1300" b="0" i="0" dirty="0">
+              <a:rPr lang="en-US" sz="1500" b="0" i="0" dirty="0">
                 <a:solidFill>
                   <a:srgbClr val="555960"/>
                 </a:solidFill>
@@ -26200,7 +26192,7 @@
               <a:buNone/>
             </a:pPr>
             <a:r>
-              <a:rPr lang="en-US" sz="1300" b="0" i="0" dirty="0">
+              <a:rPr lang="en-US" sz="1500" b="0" i="0" dirty="0">
                 <a:solidFill>
                   <a:srgbClr val="555960"/>
                 </a:solidFill>
@@ -28280,7 +28272,7 @@
               <a:buNone/>
             </a:pPr>
             <a:r>
-              <a:rPr lang="en-US" sz="1200" b="0" i="0" dirty="0">
+              <a:rPr lang="en-US" sz="1500" b="0" i="0" dirty="0">
                 <a:solidFill>
                   <a:srgbClr val="555960"/>
                 </a:solidFill>
@@ -28321,7 +28313,7 @@
               <a:buNone/>
             </a:pPr>
             <a:r>
-              <a:rPr lang="en-US" sz="1200" b="0" i="0" dirty="0">
+              <a:rPr lang="en-US" sz="1500" b="0" i="0" dirty="0">
                 <a:solidFill>
                   <a:srgbClr val="555960"/>
                 </a:solidFill>
@@ -28362,7 +28354,7 @@
               <a:buNone/>
             </a:pPr>
             <a:r>
-              <a:rPr lang="en-US" sz="1200" b="0" i="0" dirty="0">
+              <a:rPr lang="en-US" sz="1500" b="0" i="0" dirty="0">
                 <a:solidFill>
                   <a:srgbClr val="555960"/>
                 </a:solidFill>
@@ -28403,7 +28395,7 @@
               <a:buNone/>
             </a:pPr>
             <a:r>
-              <a:rPr lang="en-US" sz="1200" b="0" i="0" dirty="0">
+              <a:rPr lang="en-US" sz="1500" b="0" i="0" dirty="0">
                 <a:solidFill>
                   <a:srgbClr val="555960"/>
                 </a:solidFill>
@@ -28444,7 +28436,7 @@
               <a:buNone/>
             </a:pPr>
             <a:r>
-              <a:rPr lang="en-US" sz="1200" b="0" i="0" dirty="0">
+              <a:rPr lang="en-US" sz="1500" b="0" i="0" dirty="0">
                 <a:solidFill>
                   <a:srgbClr val="555960"/>
                 </a:solidFill>
@@ -28485,7 +28477,7 @@
               <a:buNone/>
             </a:pPr>
             <a:r>
-              <a:rPr lang="en-US" sz="1200" b="0" i="0" dirty="0">
+              <a:rPr lang="en-US" sz="1500" b="0" i="0" dirty="0">
                 <a:solidFill>
                   <a:srgbClr val="555960"/>
                 </a:solidFill>
@@ -28522,7 +28514,7 @@
               <a:buNone/>
             </a:pPr>
             <a:r>
-              <a:rPr lang="en-US" sz="1500" b="0" i="1" dirty="0">
+              <a:rPr lang="en-US" sz="1700" b="0" i="1" dirty="0">
                 <a:solidFill>
                   <a:srgbClr val="555960"/>
                 </a:solidFill>
@@ -28559,7 +28551,7 @@
               <a:buNone/>
             </a:pPr>
             <a:r>
-              <a:rPr lang="en-US" sz="1500" b="0" i="1" dirty="0">
+              <a:rPr lang="en-US" sz="1700" b="0" i="1" dirty="0">
                 <a:solidFill>
                   <a:srgbClr val="555960"/>
                 </a:solidFill>
@@ -28596,7 +28588,7 @@
               <a:buNone/>
             </a:pPr>
             <a:r>
-              <a:rPr lang="en-US" sz="1500" b="0" i="1" dirty="0">
+              <a:rPr lang="en-US" sz="1700" b="0" i="1" dirty="0">
                 <a:solidFill>
                   <a:srgbClr val="555960"/>
                 </a:solidFill>
@@ -29405,7 +29397,7 @@
               <a:buNone/>
             </a:pPr>
             <a:r>
-              <a:rPr lang="en-US" sz="1600" b="1" i="0" dirty="0">
+              <a:rPr lang="en-US" sz="1800" b="1" i="0" dirty="0">
                 <a:solidFill>
                   <a:srgbClr val="5C4826"/>
                 </a:solidFill>
@@ -29446,7 +29438,7 @@
               <a:buNone/>
             </a:pPr>
             <a:r>
-              <a:rPr lang="en-US" sz="1600" b="1" i="0" dirty="0">
+              <a:rPr lang="en-US" sz="1800" b="1" i="0" dirty="0">
                 <a:solidFill>
                   <a:srgbClr val="5C4826"/>
                 </a:solidFill>
@@ -29487,7 +29479,7 @@
               <a:buNone/>
             </a:pPr>
             <a:r>
-              <a:rPr lang="en-US" sz="1600" b="1" i="0" dirty="0">
+              <a:rPr lang="en-US" sz="1800" b="1" i="0" dirty="0">
                 <a:solidFill>
                   <a:srgbClr val="5C4826"/>
                 </a:solidFill>
@@ -29528,7 +29520,7 @@
               <a:buNone/>
             </a:pPr>
             <a:r>
-              <a:rPr lang="en-US" sz="1600" b="1" i="0" dirty="0">
+              <a:rPr lang="en-US" sz="1800" b="1" i="0" dirty="0">
                 <a:solidFill>
                   <a:srgbClr val="5C4826"/>
                 </a:solidFill>
@@ -29569,7 +29561,7 @@
               <a:buNone/>
             </a:pPr>
             <a:r>
-              <a:rPr lang="en-US" sz="1600" b="1" i="0" dirty="0">
+              <a:rPr lang="en-US" sz="1800" b="1" i="0" dirty="0">
                 <a:solidFill>
                   <a:srgbClr val="5C4826"/>
                 </a:solidFill>
@@ -29939,7 +29931,7 @@
               <a:buNone/>
             </a:pPr>
             <a:r>
-              <a:rPr lang="en-US" sz="1400" b="1" i="0" dirty="0">
+              <a:rPr lang="en-US" sz="1600" b="1" i="0" dirty="0">
                 <a:solidFill>
                   <a:srgbClr val="5C4826"/>
                 </a:solidFill>
@@ -29980,7 +29972,7 @@
               <a:buNone/>
             </a:pPr>
             <a:r>
-              <a:rPr lang="en-US" sz="1400" b="1" i="0" dirty="0">
+              <a:rPr lang="en-US" sz="1600" b="1" i="0" dirty="0">
                 <a:solidFill>
                   <a:srgbClr val="5C4826"/>
                 </a:solidFill>
@@ -30021,7 +30013,7 @@
               <a:buNone/>
             </a:pPr>
             <a:r>
-              <a:rPr lang="en-US" sz="1400" b="1" i="0" dirty="0">
+              <a:rPr lang="en-US" sz="1600" b="1" i="0" dirty="0">
                 <a:solidFill>
                   <a:srgbClr val="5C4826"/>
                 </a:solidFill>
@@ -30062,7 +30054,7 @@
               <a:buNone/>
             </a:pPr>
             <a:r>
-              <a:rPr lang="en-US" sz="1400" b="1" i="0" dirty="0">
+              <a:rPr lang="en-US" sz="1600" b="1" i="0" dirty="0">
                 <a:solidFill>
                   <a:srgbClr val="5C4826"/>
                 </a:solidFill>
@@ -30104,7 +30096,7 @@
               <a:buNone/>
             </a:pPr>
             <a:r>
-              <a:rPr lang="en-US" sz="1400" b="0" i="0" dirty="0">
+              <a:rPr lang="en-US" sz="1600" b="0" i="0" dirty="0">
                 <a:solidFill>
                   <a:srgbClr val="555960"/>
                 </a:solidFill>
@@ -30146,7 +30138,7 @@
               <a:buNone/>
             </a:pPr>
             <a:r>
-              <a:rPr lang="en-US" sz="1400" b="0" i="0" dirty="0">
+              <a:rPr lang="en-US" sz="1600" b="0" i="0" dirty="0">
                 <a:solidFill>
                   <a:srgbClr val="555960"/>
                 </a:solidFill>

--- a/course/lectures/act-2-delegation-and-control/01-delegation/2-1-Agents.pptx
+++ b/course/lectures/act-2-delegation-and-control/01-delegation/2-1-Agents.pptx
@@ -851,7 +851,7 @@
           <a:p>
             <a:r>
               <a:rPr dirty="0"/>
-              <a:t>- Say 'engineering models' explicitly in the INFORMATION row, and say why: 'model' without the adjective collides with the reasoner.</a:t>
+              <a:t>- Say 'engineering models' explicitly in the INFORMATION row; do not debate the terminology with the class.</a:t>
             </a:r>
           </a:p>
           <a:p>

--- a/course/lectures/act-2-delegation-and-control/01-delegation/2-1-Agents.pptx
+++ b/course/lectures/act-2-delegation-and-control/01-delegation/2-1-Agents.pptx
@@ -14120,7 +14120,7 @@
           <a:p>
             <a:pPr algn="l">
               <a:spcAft>
-                <a:spcPts val="400"/>
+                <a:spcPts val="1600"/>
               </a:spcAft>
             </a:pPr>
             <a:r>
@@ -14135,7 +14135,7 @@
           <a:p>
             <a:pPr algn="l">
               <a:spcAft>
-                <a:spcPts val="400"/>
+                <a:spcPts val="1600"/>
               </a:spcAft>
             </a:pPr>
             <a:r>
@@ -14144,7 +14144,7 @@
                   <a:srgbClr val="5C4826"/>
                 </a:solidFill>
               </a:rPr>
-              <a:t>What engineering knowledge should be available to the agent?</a:t>
+              <a:t>How will you scope the knowledge given to the agent?</a:t>
             </a:r>
           </a:p>
           <a:p>
@@ -14159,7 +14159,7 @@
                   <a:srgbClr val="5C4826"/>
                 </a:solidFill>
               </a:rPr>
-              <a:t>What should be represented explicitly rather than repeatedly reconstructed?</a:t>
+              <a:t>How will those artifacts and limits bound the problem?</a:t>
             </a:r>
           </a:p>
         </p:txBody>
@@ -14211,7 +14211,7 @@
         <p:spPr>
           <a:xfrm>
             <a:off x="365760" y="4306824"/>
-            <a:ext cx="6080760" cy="1481328"/>
+            <a:ext cx="6080760" cy="1389888"/>
           </a:xfrm>
           <a:prstGeom prst="rect">
             <a:avLst/>
@@ -14245,7 +14245,7 @@
           <a:p>
             <a:pPr algn="l">
               <a:spcAft>
-                <a:spcPts val="400"/>
+                <a:spcPts val="1600"/>
               </a:spcAft>
             </a:pPr>
             <a:r>
@@ -14254,22 +14254,7 @@
                   <a:srgbClr val="5C4826"/>
                 </a:solidFill>
               </a:rPr>
-              <a:t>What tools or services will implementation require?</a:t>
-            </a:r>
-          </a:p>
-          <a:p>
-            <a:pPr algn="l">
-              <a:spcAft>
-                <a:spcPts val="400"/>
-              </a:spcAft>
-            </a:pPr>
-            <a:r>
-              <a:rPr dirty="0">
-                <a:solidFill>
-                  <a:srgbClr val="5C4826"/>
-                </a:solidFill>
-              </a:rPr>
-              <a:t>How will relevant context and state reach the agent?</a:t>
+              <a:t>Which specific tools will the agents need for your project implementation?</a:t>
             </a:r>
           </a:p>
           <a:p>
@@ -14284,7 +14269,7 @@
                   <a:srgbClr val="5C4826"/>
                 </a:solidFill>
               </a:rPr>
-              <a:t>Identify one useful external capability and how the harness will expose it.</a:t>
+              <a:t>Describe one MCP interface that abstracts access to the tools.</a:t>
             </a:r>
           </a:p>
         </p:txBody>

--- a/course/lectures/act-2-delegation-and-control/01-delegation/2-1-Agents.pptx
+++ b/course/lectures/act-2-delegation-and-control/01-delegation/2-1-Agents.pptx
@@ -6569,33 +6569,73 @@
       </p:grpSpPr>
       <p:sp>
         <p:nvSpPr>
-          <p:cNvPr id="2" name="Title 2"/>
-          <p:cNvSpPr>
-            <a:spLocks noGrp="1"/>
+          <p:cNvPr id="2" name="Title 2">
+            <a:extLst>
+              <a:ext uri="{FF2B5EF4-FFF2-40B4-BE49-F238E27FC236}">
+                <a16:creationId xmlns:a16="http://schemas.microsoft.com/office/drawing/2014/main" id="{DD7291C3-5AE9-477A-3F39-34A06A62D99C}"/>
+              </a:ext>
+            </a:extLst>
+          </p:cNvPr>
+          <p:cNvSpPr txBox="1">
+            <a:spLocks/>
           </p:cNvSpPr>
-          <p:nvPr>
-            <p:ph type="ctrTitle"/>
-          </p:nvPr>
-        </p:nvSpPr>
-        <p:spPr>
-          <a:xfrm>
-            <a:off x="439339" y="565150"/>
-            <a:ext cx="8265319" cy="700000"/>
-          </a:xfrm>
-        </p:spPr>
-        <p:txBody>
-          <a:bodyPr>
+          <p:nvPr/>
+        </p:nvSpPr>
+        <p:spPr bwMode="black">
+          <a:xfrm>
+            <a:off x="439339" y="565149"/>
+            <a:ext cx="8265319" cy="1195411"/>
+          </a:xfrm>
+          <a:prstGeom prst="rect">
+            <a:avLst/>
+          </a:prstGeom>
+          <a:solidFill>
+            <a:srgbClr val="FFFFFF"/>
+          </a:solidFill>
+          <a:ln w="31750" cap="sq">
+            <a:noFill/>
+            <a:miter lim="800000"/>
+          </a:ln>
+        </p:spPr>
+        <p:txBody>
+          <a:bodyPr vert="horz" lIns="182880" tIns="182880" rIns="182880" bIns="182880" rtlCol="0" anchor="ctr">
             <a:normAutofit/>
           </a:bodyPr>
-          <a:lstStyle/>
-          <a:p>
-            <a:pPr>
-              <a:defRPr b="0"/>
-            </a:pPr>
-            <a:r>
-              <a:rPr lang="en-US" sz="2000" b="0" i="1" dirty="0"/>
-              <a:t>ECE 30861/46100: Software Engineering</a:t>
-            </a:r>
+          <a:lstStyle>
+            <a:lvl1pPr algn="ctr" defTabSz="914400" rtl="0" eaLnBrk="1" latinLnBrk="0" hangingPunct="1">
+              <a:lnSpc>
+                <a:spcPct val="90000"/>
+              </a:lnSpc>
+              <a:spcBef>
+                <a:spcPct val="0"/>
+              </a:spcBef>
+              <a:buNone/>
+              <a:defRPr sz="3600" kern="1200" cap="none" spc="200" baseline="0">
+                <a:solidFill>
+                  <a:srgbClr val="000000"/>
+                </a:solidFill>
+                <a:latin typeface="Calibri" panose="020F0502020204030204" pitchFamily="34" charset="0"/>
+                <a:ea typeface="+mj-ea"/>
+                <a:cs typeface="Calibri" panose="020F0502020204030204" pitchFamily="34" charset="0"/>
+              </a:defRPr>
+            </a:lvl1pPr>
+          </a:lstStyle>
+          <a:p>
+            <a:r>
+              <a:rPr lang="en-US" sz="2000" i="1" dirty="0"/>
+              <a:t>Software Engineering</a:t>
+            </a:r>
+            <a:br>
+              <a:rPr lang="en-US" sz="2000" i="1" dirty="0"/>
+            </a:br>
+            <a:br>
+              <a:rPr lang="en-US" sz="2000" i="1" dirty="0"/>
+            </a:br>
+            <a:r>
+              <a:rPr lang="en-US" sz="1600" i="1" dirty="0"/>
+              <a:t>ECE 30861 / CSCI 45000</a:t>
+            </a:r>
+            <a:endParaRPr lang="en-US" sz="2000" i="1" dirty="0"/>
           </a:p>
         </p:txBody>
       </p:sp>

--- a/course/lectures/act-2-delegation-and-control/01-delegation/2-1-Agents.pptx
+++ b/course/lectures/act-2-delegation-and-control/01-delegation/2-1-Agents.pptx
@@ -3280,49 +3280,32 @@
       </p:sp>
       <p:pic>
         <p:nvPicPr>
-          <p:cNvPr id="1026" name="Picture 2" descr="Electrical and Computer Engineering Black and Gold Co-Brand Logo">
+          <p:cNvPr id="1026" name="Purdue CoBrand">
             <a:extLst>
               <a:ext uri="{FF2B5EF4-FFF2-40B4-BE49-F238E27FC236}">
-                <a16:creationId xmlns:a16="http://schemas.microsoft.com/office/drawing/2014/main" id="{DA2A365A-4E3B-2A48-8812-990B2A2EE92D}"/>
+                <a16:creationId xmlns:a16="http://schemas.microsoft.com/office/drawing/2014/main" id="{BCBD89D8-43BD-5D41-99C6-91B0B6A51904}"/>
               </a:ext>
             </a:extLst>
           </p:cNvPr>
           <p:cNvPicPr>
-            <a:picLocks noChangeAspect="1" noChangeArrowheads="1"/>
+            <a:picLocks noChangeAspect="1"/>
           </p:cNvPicPr>
           <p:nvPr userDrawn="1"/>
         </p:nvPicPr>
         <p:blipFill>
-          <a:blip r:embed="rId2">
-            <a:extLst>
-              <a:ext uri="{28A0092B-C50C-407E-A947-70E740481C1C}">
-                <a14:useLocalDpi xmlns:a14="http://schemas.microsoft.com/office/drawing/2010/main" val="0"/>
-              </a:ext>
-            </a:extLst>
-          </a:blip>
-          <a:srcRect/>
+          <a:blip r:embed="rId2"/>
           <a:stretch>
             <a:fillRect/>
           </a:stretch>
         </p:blipFill>
-        <p:spPr bwMode="auto">
-          <a:xfrm>
-            <a:off x="3876158" y="5721845"/>
-            <a:ext cx="1264684" cy="999630"/>
-          </a:xfrm>
-          <a:prstGeom prst="rect">
-            <a:avLst/>
-          </a:prstGeom>
-          <a:noFill/>
-          <a:extLst>
-            <a:ext uri="{909E8E84-426E-40DD-AFC4-6F175D3DCCD1}">
-              <a14:hiddenFill xmlns:a14="http://schemas.microsoft.com/office/drawing/2010/main">
-                <a:solidFill>
-                  <a:srgbClr val="FFFFFF"/>
-                </a:solidFill>
-              </a14:hiddenFill>
-            </a:ext>
-          </a:extLst>
+        <p:spPr>
+          <a:xfrm>
+            <a:off x="2097131" y="5715964"/>
+            <a:ext cx="5091026" cy="542584"/>
+          </a:xfrm>
+          <a:prstGeom prst="rect">
+            <a:avLst/>
+          </a:prstGeom>
         </p:spPr>
       </p:pic>
     </p:spTree>

--- a/course/lectures/act-2-delegation-and-control/01-delegation/2-1-Agents.pptx
+++ b/course/lectures/act-2-delegation-and-control/01-delegation/2-1-Agents.pptx
@@ -40,6 +40,7 @@
     <p:sldId id="730" r:id="rId31"/>
     <p:sldId id="731" r:id="rId32"/>
     <p:sldId id="732" r:id="rId33"/>
+    <p:sldId id="735" r:id="rId41"/>
     <p:sldId id="733" r:id="rId34"/>
     <p:sldId id="734" r:id="rId35"/>
   </p:sldIdLst>
@@ -2504,6 +2505,12 @@
               <a:t>- Closing line: agents change who can perform realization; the rest of Act II asks how engineering retains informed control.</a:t>
             </a:r>
           </a:p>
+          <a:p>
+            <a:r>
+              <a:rPr dirty="0"/>
+              <a:t>- Point back one slide: these three questions now have a place to live on the picture. Modeling and Alignment are the two annotations; failure-aware engineering is what you do when the artifact that passed turns out to be wrong.</a:t>
+            </a:r>
+          </a:p>
         </p:txBody>
       </p:sp>
     </p:spTree>
@@ -2577,6 +2584,122 @@
             </a:r>
           </a:p>
         </p:txBody>
+      </p:sp>
+    </p:spTree>
+  </p:cSld>
+  <p:clrMapOvr>
+    <a:masterClrMapping/>
+  </p:clrMapOvr>
+</p:notes>
+</file>
+
+<file path=ppt/notesSlides/notesSlide35.xml><?xml version="1.0" encoding="utf-8"?>
+<p:notes xmlns:a="http://schemas.openxmlformats.org/drawingml/2006/main" xmlns:p="http://schemas.openxmlformats.org/presentationml/2006/main" xmlns:r="http://schemas.openxmlformats.org/officeDocument/2006/relationships">
+  <p:cSld>
+    <p:spTree>
+      <p:nvGrpSpPr>
+        <p:cNvPr id="1" name=""/>
+        <p:cNvGrpSpPr/>
+        <p:nvPr/>
+      </p:nvGrpSpPr>
+      <p:grpSpPr>
+        <a:xfrm>
+          <a:off x="0" y="0"/>
+          <a:ext cx="0" cy="0"/>
+          <a:chOff x="0" y="0"/>
+          <a:chExt cx="0" cy="0"/>
+        </a:xfrm>
+      </p:grpSpPr>
+      <p:sp>
+        <p:nvSpPr>
+          <p:cNvPr id="2" name="Slide Image Placeholder 1"/>
+          <p:cNvSpPr>
+            <a:spLocks noGrp="1"/>
+          </p:cNvSpPr>
+          <p:nvPr>
+            <p:ph type="sldImg" idx="2"/>
+          </p:nvPr>
+        </p:nvSpPr>
+        <p:spPr/>
+      </p:sp>
+      <p:sp>
+        <p:nvSpPr>
+          <p:cNvPr id="3" name="Notes Placeholder 2"/>
+          <p:cNvSpPr>
+            <a:spLocks noGrp="1"/>
+          </p:cNvSpPr>
+          <p:nvPr>
+            <p:ph type="body" idx="3" sz="quarter"/>
+          </p:nvPr>
+        </p:nvSpPr>
+        <p:spPr/>
+        <p:txBody>
+          <a:bodyPr/>
+          <a:lstStyle/>
+          <a:p>
+            <a:r>
+              <a:t>1.5 minutes — The answer to the question you just asked, in one picture: the agent sits inside an engineered environment.</a:t>
+            </a:r>
+          </a:p>
+          <a:p/>
+          <a:p>
+            <a:r>
+              <a:t>- This is the master picture for the rest of Act II. Here it is entirely qualitative. Modeling and Alignment bring it back and put numbers on it.</a:t>
+            </a:r>
+          </a:p>
+          <a:p>
+            <a:r>
+              <a:t>- The path first. A task enters, a reasoner works, an artifact comes out. Nothing on this row is new; you have seen every piece of it today.</a:t>
+            </a:r>
+          </a:p>
+          <a:p>
+            <a:r>
+              <a:t>- Click one. MODELS is the one station drawn with a heavy rim, and its arrow enters the path BEFORE the reasoner runs. That is the whole claim of the next lecture: what the models carry sets the reasoning surface the agent gets to work on.</a:t>
+            </a:r>
+          </a:p>
+          <a:p>
+            <a:r>
+              <a:t>- Click two. ALIGNMENT is the only annotation whose arrow crosses the boundary of the environment. Something has to govern whether the artifact may leave and acquire consequence.</a:t>
+            </a:r>
+          </a:p>
+          <a:p>
+            <a:r>
+              <a:t>- Say the two jobs aloud, in these words: Modeling acts on the reasoning problem, before and during the work; Alignment acts on whether the result may acquire consequence.</a:t>
+            </a:r>
+          </a:p>
+          <a:p>
+            <a:r>
+              <a:t>- Both are OUTSIDE the agent. That is the answer to the slide you just left: the engineering knowledge that must persist, and the obligations the environment enforces.</a:t>
+            </a:r>
+          </a:p>
+          <a:p>
+            <a:r>
+              <a:t>- The colour code belongs to this PICTURE, not to the deck: red is Modeling's lever, blue is Alignment's, and it returns whenever the picture returns. The gold chips on the next slide are the deck's ordinary chrome, not a contradiction. Nothing here rests on colour alone — the words carry it, and so does the drawing: Modeling's stroke is solid and lands on the path, Alignment's are dashed because passage is conditional, and only Alignment's crosses the boundary.</a:t>
+            </a:r>
+          </a:p>
+          <a:p>
+            <a:r>
+              <a:t>- Leave the space under the station row empty and do not fill it. In Modeling that is exactly where the arithmetic arrives.</a:t>
+            </a:r>
+          </a:p>
+          <a:p>
+            <a:r>
+              <a:t>- Do not answer the think-pair-share questions here. Show the shape of the answer, then move on.</a:t>
+            </a:r>
+          </a:p>
+        </p:txBody>
+      </p:sp>
+      <p:sp>
+        <p:nvSpPr>
+          <p:cNvPr id="4" name="Slide Number Placeholder 3"/>
+          <p:cNvSpPr>
+            <a:spLocks noGrp="1"/>
+          </p:cNvSpPr>
+          <p:nvPr>
+            <p:ph type="sldNum" idx="5" sz="quarter"/>
+          </p:nvPr>
+        </p:nvSpPr>
+        <p:spPr/>
       </p:sp>
     </p:spTree>
   </p:cSld>
@@ -25145,6 +25268,1087 @@
   <p:clrMapOvr>
     <a:masterClrMapping/>
   </p:clrMapOvr>
+</p:sld>
+</file>
+
+<file path=ppt/slides/slide35.xml><?xml version="1.0" encoding="utf-8"?>
+<p:sld xmlns:a="http://schemas.openxmlformats.org/drawingml/2006/main" xmlns:p="http://schemas.openxmlformats.org/presentationml/2006/main" xmlns:r="http://schemas.openxmlformats.org/officeDocument/2006/relationships">
+  <p:cSld>
+    <p:spTree>
+      <p:nvGrpSpPr>
+        <p:cNvPr id="1" name=""/>
+        <p:cNvGrpSpPr/>
+        <p:nvPr/>
+      </p:nvGrpSpPr>
+      <p:grpSpPr/>
+      <p:sp>
+        <p:nvSpPr>
+          <p:cNvPr id="2" name="Title 1"/>
+          <p:cNvSpPr>
+            <a:spLocks noGrp="1"/>
+          </p:cNvSpPr>
+          <p:nvPr>
+            <p:ph type="title"/>
+          </p:nvPr>
+        </p:nvSpPr>
+        <p:spPr>
+          <a:xfrm>
+            <a:off x="277148" y="118428"/>
+            <a:ext cx="8590000" cy="638175"/>
+          </a:xfrm>
+        </p:spPr>
+        <p:txBody>
+          <a:bodyPr>
+            <a:normAutofit fontScale="90000"/>
+          </a:bodyPr>
+          <a:lstStyle/>
+          <a:p>
+            <a:pPr>
+              <a:buNone/>
+              <a:defRPr b="0"/>
+            </a:pPr>
+            <a:r>
+              <a:rPr lang="en-US" sz="2400" b="0" i="0" dirty="0">
+                <a:solidFill>
+                  <a:srgbClr val="000000"/>
+                </a:solidFill>
+              </a:rPr>
+              <a:t>The agent works inside an engineered environment</a:t>
+            </a:r>
+          </a:p>
+        </p:txBody>
+      </p:sp>
+      <p:sp>
+        <p:nvSpPr>
+          <p:cNvPr id="3" name="Slide Number Placeholder 3"/>
+          <p:cNvSpPr>
+            <a:spLocks noGrp="1"/>
+          </p:cNvSpPr>
+          <p:nvPr>
+            <p:ph type="sldNum" sz="quarter" idx="4"/>
+          </p:nvPr>
+        </p:nvSpPr>
+        <p:spPr/>
+        <p:txBody>
+          <a:bodyPr/>
+          <a:lstStyle/>
+          <a:p>
+            <a:fld id="{B7EB45DA-9A0D-DC49-8E02-F30A5DDC21C3}" type="slidenum">
+              <a:rPr lang="en-US" smtClean="0"/>
+              <a:t>1</a:t>
+            </a:fld>
+            <a:endParaRPr lang="en-US"/>
+          </a:p>
+        </p:txBody>
+      </p:sp>
+      <p:sp>
+        <p:nvSpPr>
+          <p:cNvPr id="100" name="Env" descr="Enclosure labelled ENGINEERING ENVIRONMENT containing the whole delegation path: a task enters, a reasoner works, an artifact comes out, and a models station feeds the path before the reasoner runs."/>
+          <p:cNvSpPr/>
+          <p:nvPr/>
+        </p:nvSpPr>
+        <p:spPr>
+          <a:xfrm>
+            <a:off x="274320" y="896112"/>
+            <a:ext cx="7498080" cy="4370832"/>
+          </a:xfrm>
+          <a:prstGeom prst="rect">
+            <a:avLst/>
+          </a:prstGeom>
+          <a:noFill/>
+          <a:ln w="25400">
+            <a:solidFill>
+              <a:srgbClr val="8E6F3E"/>
+            </a:solidFill>
+          </a:ln>
+        </p:spPr>
+        <p:txBody>
+          <a:bodyPr/>
+          <a:lstStyle/>
+          <a:p>
+            <a:endParaRPr/>
+          </a:p>
+        </p:txBody>
+      </p:sp>
+      <p:sp>
+        <p:nvSpPr>
+          <p:cNvPr id="101" name="EnvLbl" descr="Label: ENGINEERING ENVIRONMENT"/>
+          <p:cNvSpPr txBox="1"/>
+          <p:nvPr/>
+        </p:nvSpPr>
+        <p:spPr>
+          <a:xfrm>
+            <a:off x="548640" y="969264"/>
+            <a:ext cx="6949440" cy="384048"/>
+          </a:xfrm>
+          <a:prstGeom prst="rect">
+            <a:avLst/>
+          </a:prstGeom>
+          <a:noFill/>
+          <a:ln>
+            <a:noFill/>
+          </a:ln>
+        </p:spPr>
+        <p:txBody>
+          <a:bodyPr wrap="square" lIns="0" tIns="0" rIns="0" bIns="0" anchor="ctr"/>
+          <a:lstStyle/>
+          <a:p>
+            <a:pPr algn="ctr">
+              <a:buNone/>
+            </a:pPr>
+            <a:r>
+              <a:rPr lang="en-US" sz="2000" b="1" i="0" dirty="0">
+                <a:solidFill>
+                  <a:srgbClr val="8E6F3E"/>
+                </a:solidFill>
+              </a:rPr>
+              <a:t>ENGINEERING ENVIRONMENT</a:t>
+            </a:r>
+          </a:p>
+        </p:txBody>
+      </p:sp>
+      <p:sp>
+        <p:nvSpPr>
+          <p:cNvPr id="102" name="Task" descr="Station 1 of 4: TASK, what we want done."/>
+          <p:cNvSpPr/>
+          <p:nvPr/>
+        </p:nvSpPr>
+        <p:spPr>
+          <a:xfrm>
+            <a:off x="548640" y="3438144"/>
+            <a:ext cx="1645920" cy="731520"/>
+          </a:xfrm>
+          <a:prstGeom prst="rect">
+            <a:avLst/>
+          </a:prstGeom>
+          <a:solidFill>
+            <a:srgbClr val="F5F1E8"/>
+          </a:solidFill>
+          <a:ln w="19050">
+            <a:solidFill>
+              <a:srgbClr val="C9B991"/>
+            </a:solidFill>
+          </a:ln>
+        </p:spPr>
+        <p:txBody>
+          <a:bodyPr wrap="square" lIns="27432" tIns="22860" rIns="27432" bIns="22860" anchor="ctr"/>
+          <a:lstStyle/>
+          <a:p>
+            <a:pPr algn="ctr">
+              <a:buNone/>
+            </a:pPr>
+            <a:r>
+              <a:rPr lang="en-US" sz="1800" b="1" i="0" dirty="0">
+                <a:solidFill>
+                  <a:srgbClr val="5C4826"/>
+                </a:solidFill>
+              </a:rPr>
+              <a:t>TASK</a:t>
+            </a:r>
+          </a:p>
+        </p:txBody>
+      </p:sp>
+      <p:cxnSp>
+        <p:nvCxnSpPr>
+          <p:cNvPr id="103" name="Conn1" descr="Arrow from TASK to REASONER; the models station feeds this segment."/>
+          <p:cNvCxnSpPr/>
+          <p:nvPr/>
+        </p:nvCxnSpPr>
+        <p:spPr>
+          <a:xfrm>
+            <a:off x="2258568" y="3803904"/>
+            <a:ext cx="886968" cy="0"/>
+          </a:xfrm>
+          <a:prstGeom prst="straightConnector1">
+            <a:avLst/>
+          </a:prstGeom>
+          <a:ln w="34925">
+            <a:solidFill>
+              <a:srgbClr val="8E6F3E"/>
+            </a:solidFill>
+            <a:tailEnd type="triangle" w="lg" len="lg"/>
+          </a:ln>
+        </p:spPr>
+      </p:cxnSp>
+      <p:sp>
+        <p:nvSpPr>
+          <p:cNvPr id="104" name="Reasoner" descr="Station 3 of 4: REASONER, what does the work."/>
+          <p:cNvSpPr/>
+          <p:nvPr/>
+        </p:nvSpPr>
+        <p:spPr>
+          <a:xfrm>
+            <a:off x="3200400" y="3438144"/>
+            <a:ext cx="1645920" cy="731520"/>
+          </a:xfrm>
+          <a:prstGeom prst="rect">
+            <a:avLst/>
+          </a:prstGeom>
+          <a:solidFill>
+            <a:srgbClr val="F5F1E8"/>
+          </a:solidFill>
+          <a:ln w="19050">
+            <a:solidFill>
+              <a:srgbClr val="C9B991"/>
+            </a:solidFill>
+          </a:ln>
+        </p:spPr>
+        <p:txBody>
+          <a:bodyPr wrap="square" lIns="27432" tIns="22860" rIns="27432" bIns="22860" anchor="ctr"/>
+          <a:lstStyle/>
+          <a:p>
+            <a:pPr algn="ctr">
+              <a:buNone/>
+            </a:pPr>
+            <a:r>
+              <a:rPr lang="en-US" sz="1800" b="1" i="0" dirty="0">
+                <a:solidFill>
+                  <a:srgbClr val="5C4826"/>
+                </a:solidFill>
+              </a:rPr>
+              <a:t>REASONER</a:t>
+            </a:r>
+          </a:p>
+        </p:txBody>
+      </p:sp>
+      <p:sp>
+        <p:nvSpPr>
+          <p:cNvPr id="105" name="RealLbl" descr="Label on the arrow from REASONER to ARTIFACT: realization."/>
+          <p:cNvSpPr txBox="1"/>
+          <p:nvPr/>
+        </p:nvSpPr>
+        <p:spPr>
+          <a:xfrm>
+            <a:off x="4846320" y="3456432"/>
+            <a:ext cx="1005840" cy="292608"/>
+          </a:xfrm>
+          <a:prstGeom prst="rect">
+            <a:avLst/>
+          </a:prstGeom>
+          <a:noFill/>
+          <a:ln>
+            <a:noFill/>
+          </a:ln>
+        </p:spPr>
+        <p:txBody>
+          <a:bodyPr wrap="none" lIns="0" tIns="0" rIns="0" bIns="0" anchor="ctr"/>
+          <a:lstStyle/>
+          <a:p>
+            <a:pPr algn="ctr">
+              <a:buNone/>
+            </a:pPr>
+            <a:r>
+              <a:rPr lang="en-US" sz="1500" b="0" i="1" dirty="0">
+                <a:solidFill>
+                  <a:srgbClr val="555960"/>
+                </a:solidFill>
+              </a:rPr>
+              <a:t>realization</a:t>
+            </a:r>
+          </a:p>
+        </p:txBody>
+      </p:sp>
+      <p:cxnSp>
+        <p:nvCxnSpPr>
+          <p:cNvPr id="106" name="Conn2" descr="Arrow from REASONER to ARTIFACT, labelled realization."/>
+          <p:cNvCxnSpPr/>
+          <p:nvPr/>
+        </p:nvCxnSpPr>
+        <p:spPr>
+          <a:xfrm>
+            <a:off x="4910328" y="3803904"/>
+            <a:ext cx="886968" cy="0"/>
+          </a:xfrm>
+          <a:prstGeom prst="straightConnector1">
+            <a:avLst/>
+          </a:prstGeom>
+          <a:ln w="34925">
+            <a:solidFill>
+              <a:srgbClr val="8E6F3E"/>
+            </a:solidFill>
+            <a:tailEnd type="triangle" w="lg" len="lg"/>
+          </a:ln>
+        </p:spPr>
+      </p:cxnSp>
+      <p:sp>
+        <p:nvSpPr>
+          <p:cNvPr id="107" name="Artifact" descr="Station 4 of 4: ARTIFACT, what comes out."/>
+          <p:cNvSpPr/>
+          <p:nvPr/>
+        </p:nvSpPr>
+        <p:spPr>
+          <a:xfrm>
+            <a:off x="5852160" y="3438144"/>
+            <a:ext cx="1645920" cy="731520"/>
+          </a:xfrm>
+          <a:prstGeom prst="rect">
+            <a:avLst/>
+          </a:prstGeom>
+          <a:solidFill>
+            <a:srgbClr val="F5F1E8"/>
+          </a:solidFill>
+          <a:ln w="19050">
+            <a:solidFill>
+              <a:srgbClr val="C9B991"/>
+            </a:solidFill>
+          </a:ln>
+        </p:spPr>
+        <p:txBody>
+          <a:bodyPr wrap="square" lIns="27432" tIns="22860" rIns="27432" bIns="22860" anchor="ctr"/>
+          <a:lstStyle/>
+          <a:p>
+            <a:pPr algn="ctr">
+              <a:buNone/>
+            </a:pPr>
+            <a:r>
+              <a:rPr lang="en-US" sz="1800" b="1" i="0" dirty="0">
+                <a:solidFill>
+                  <a:srgbClr val="5C4826"/>
+                </a:solidFill>
+              </a:rPr>
+              <a:t>ARTIFACT</a:t>
+            </a:r>
+          </a:p>
+        </p:txBody>
+      </p:sp>
+      <p:sp>
+        <p:nvSpPr>
+          <p:cNvPr id="110" name="ModAnn" descr="Annotation, left: MODELING changes the reasoning surface."/>
+          <p:cNvSpPr txBox="1"/>
+          <p:nvPr/>
+        </p:nvSpPr>
+        <p:spPr>
+          <a:xfrm>
+            <a:off x="1143000" y="1399032"/>
+            <a:ext cx="3108960" cy="640080"/>
+          </a:xfrm>
+          <a:prstGeom prst="rect">
+            <a:avLst/>
+          </a:prstGeom>
+          <a:noFill/>
+          <a:ln>
+            <a:noFill/>
+          </a:ln>
+        </p:spPr>
+        <p:txBody>
+          <a:bodyPr wrap="square" lIns="0" tIns="0" rIns="0" bIns="0" anchor="ctr"/>
+          <a:lstStyle/>
+          <a:p>
+            <a:pPr algn="ctr">
+              <a:buNone/>
+            </a:pPr>
+            <a:r>
+              <a:rPr lang="en-US" sz="1800" b="1" i="0" dirty="0">
+                <a:solidFill>
+                  <a:srgbClr val="C8102E"/>
+                </a:solidFill>
+              </a:rPr>
+              <a:t>MODELING</a:t>
+            </a:r>
+          </a:p>
+          <a:p>
+            <a:pPr algn="ctr">
+              <a:spcBef>
+                <a:spcPts val="120"/>
+              </a:spcBef>
+              <a:buNone/>
+            </a:pPr>
+            <a:r>
+              <a:rPr lang="en-US" sz="1500" b="0" i="1" dirty="0">
+                <a:solidFill>
+                  <a:srgbClr val="555960"/>
+                </a:solidFill>
+              </a:rPr>
+              <a:t>changes the reasoning surface</a:t>
+            </a:r>
+          </a:p>
+        </p:txBody>
+      </p:sp>
+      <p:sp>
+        <p:nvSpPr>
+          <p:cNvPr id="111" name="Models" descr="Station 2 of 4, drawn with the heavy rim because it is the one station this lecture pair is about: MODELS, the representation."/>
+          <p:cNvSpPr/>
+          <p:nvPr/>
+        </p:nvSpPr>
+        <p:spPr>
+          <a:xfrm>
+            <a:off x="1874520" y="2148840"/>
+            <a:ext cx="1645920" cy="731520"/>
+          </a:xfrm>
+          <a:prstGeom prst="rect">
+            <a:avLst/>
+          </a:prstGeom>
+          <a:solidFill>
+            <a:srgbClr val="FFFFFF"/>
+          </a:solidFill>
+          <a:ln w="28575">
+            <a:solidFill>
+              <a:srgbClr val="8E6F3E"/>
+            </a:solidFill>
+          </a:ln>
+        </p:spPr>
+        <p:txBody>
+          <a:bodyPr wrap="square" lIns="27432" tIns="22860" rIns="27432" bIns="22860" anchor="ctr"/>
+          <a:lstStyle/>
+          <a:p>
+            <a:pPr algn="ctr">
+              <a:buNone/>
+            </a:pPr>
+            <a:r>
+              <a:rPr lang="en-US" sz="1800" b="1" i="0" dirty="0">
+                <a:solidFill>
+                  <a:srgbClr val="5C4826"/>
+                </a:solidFill>
+              </a:rPr>
+              <a:t>MODELS</a:t>
+            </a:r>
+          </a:p>
+        </p:txBody>
+      </p:sp>
+      <p:cxnSp>
+        <p:nvCxnSpPr>
+          <p:cNvPr id="112" name="ModArrow" descr="Modeling's lever, one solid stroke ending in an arrowhead that lands on the segment between TASK and REASONER: the representation is on the path before the reasoner ever runs."/>
+          <p:cNvCxnSpPr/>
+          <p:nvPr/>
+        </p:nvCxnSpPr>
+        <p:spPr>
+          <a:xfrm>
+            <a:off x="2697480" y="2916936"/>
+            <a:ext cx="0" cy="877824"/>
+          </a:xfrm>
+          <a:prstGeom prst="straightConnector1">
+            <a:avLst/>
+          </a:prstGeom>
+          <a:ln w="34925">
+            <a:solidFill>
+              <a:srgbClr val="C8102E"/>
+            </a:solidFill>
+            <a:tailEnd type="triangle" w="lg" len="lg"/>
+          </a:ln>
+        </p:spPr>
+      </p:cxnSp>
+      <p:sp>
+        <p:nvSpPr>
+          <p:cNvPr id="120" name="AlnAnn" descr="Annotation, right: ALIGNMENT governs what may pass."/>
+          <p:cNvSpPr txBox="1"/>
+          <p:nvPr/>
+        </p:nvSpPr>
+        <p:spPr>
+          <a:xfrm>
+            <a:off x="5440680" y="1399032"/>
+            <a:ext cx="2468880" cy="640080"/>
+          </a:xfrm>
+          <a:prstGeom prst="rect">
+            <a:avLst/>
+          </a:prstGeom>
+          <a:noFill/>
+          <a:ln>
+            <a:noFill/>
+          </a:ln>
+        </p:spPr>
+        <p:txBody>
+          <a:bodyPr wrap="square" lIns="0" tIns="0" rIns="0" bIns="0" anchor="ctr"/>
+          <a:lstStyle/>
+          <a:p>
+            <a:pPr algn="ctr">
+              <a:buNone/>
+            </a:pPr>
+            <a:r>
+              <a:rPr lang="en-US" sz="1800" b="1" i="0" dirty="0">
+                <a:solidFill>
+                  <a:srgbClr val="2E74B5"/>
+                </a:solidFill>
+              </a:rPr>
+              <a:t>ALIGNMENT</a:t>
+            </a:r>
+          </a:p>
+          <a:p>
+            <a:pPr algn="ctr">
+              <a:spcBef>
+                <a:spcPts val="120"/>
+              </a:spcBef>
+              <a:buNone/>
+            </a:pPr>
+            <a:r>
+              <a:rPr lang="en-US" sz="1500" b="0" i="1" dirty="0">
+                <a:solidFill>
+                  <a:srgbClr val="555960"/>
+                </a:solidFill>
+              </a:rPr>
+              <a:t>governs what may pass</a:t>
+            </a:r>
+          </a:p>
+        </p:txBody>
+      </p:sp>
+      <p:cxnSp>
+        <p:nvCxnSpPr>
+          <p:cNvPr id="121" name="AlnArrow" descr="Alignment's gate, part one: a solid stroke down from the annotation onto the ARTIFACT. It ends in a bar rather than an arrowhead because the gate always acts."/>
+          <p:cNvCxnSpPr/>
+          <p:nvPr/>
+        </p:nvCxnSpPr>
+        <p:spPr>
+          <a:xfrm>
+            <a:off x="6675120" y="2148840"/>
+            <a:ext cx="0" cy="1261872"/>
+          </a:xfrm>
+          <a:prstGeom prst="straightConnector1">
+            <a:avLst/>
+          </a:prstGeom>
+          <a:ln w="34925">
+            <a:solidFill>
+              <a:srgbClr val="2E74B5"/>
+            </a:solidFill>
+          </a:ln>
+        </p:spPr>
+      </p:cxnSp>
+      <p:sp>
+        <p:nvSpPr>
+          <p:cNvPr id="124" name="AlnGate" descr="Alignment's gate, part two: a bar laid across the top edge of the ARTIFACT, the checkpoint every realization is judged at."/>
+          <p:cNvSpPr/>
+          <p:nvPr/>
+        </p:nvSpPr>
+        <p:spPr>
+          <a:xfrm>
+            <a:off x="6263640" y="3406140"/>
+            <a:ext cx="822960" cy="64008"/>
+          </a:xfrm>
+          <a:prstGeom prst="rect">
+            <a:avLst/>
+          </a:prstGeom>
+          <a:solidFill>
+            <a:srgbClr val="2E74B5"/>
+          </a:solidFill>
+          <a:ln>
+            <a:noFill/>
+          </a:ln>
+        </p:spPr>
+        <p:txBody>
+          <a:bodyPr/>
+          <a:lstStyle/>
+          <a:p>
+            <a:endParaRPr/>
+          </a:p>
+        </p:txBody>
+      </p:sp>
+      <p:cxnSp>
+        <p:nvCxnSpPr>
+          <p:cNvPr id="122" name="ExitArrow" descr="The egress, and the only stroke that crosses the environment's boundary. It is dashed because that passage is the one conditional thing in the picture: the artifact leaves the engineering environment and acquires consequence only if Alignment's gate lets it."/>
+          <p:cNvCxnSpPr/>
+          <p:nvPr/>
+        </p:nvCxnSpPr>
+        <p:spPr>
+          <a:xfrm>
+            <a:off x="7562088" y="3803904"/>
+            <a:ext cx="1170432" cy="0"/>
+          </a:xfrm>
+          <a:prstGeom prst="straightConnector1">
+            <a:avLst/>
+          </a:prstGeom>
+          <a:ln w="34925">
+            <a:solidFill>
+              <a:srgbClr val="2E74B5"/>
+            </a:solidFill>
+            <a:prstDash val="dash"/>
+            <a:tailEnd type="triangle" w="lg" len="lg"/>
+          </a:ln>
+        </p:spPr>
+      </p:cxnSp>
+      <p:sp>
+        <p:nvSpPr>
+          <p:cNvPr id="123" name="ExitLbl" descr="Label on the arrow leaving the environment: consequence."/>
+          <p:cNvSpPr txBox="1"/>
+          <p:nvPr/>
+        </p:nvSpPr>
+        <p:spPr>
+          <a:xfrm>
+            <a:off x="7891272" y="3456432"/>
+            <a:ext cx="978408" cy="292608"/>
+          </a:xfrm>
+          <a:prstGeom prst="rect">
+            <a:avLst/>
+          </a:prstGeom>
+          <a:noFill/>
+          <a:ln>
+            <a:noFill/>
+          </a:ln>
+        </p:spPr>
+        <p:txBody>
+          <a:bodyPr wrap="none" lIns="0" tIns="0" rIns="0" bIns="0" anchor="ctr"/>
+          <a:lstStyle/>
+          <a:p>
+            <a:pPr algn="ctr">
+              <a:buNone/>
+            </a:pPr>
+            <a:r>
+              <a:rPr lang="en-US" sz="1500" b="0" i="1" dirty="0">
+                <a:solidFill>
+                  <a:srgbClr val="555960"/>
+                </a:solidFill>
+              </a:rPr>
+              <a:t>consequence</a:t>
+            </a:r>
+          </a:p>
+        </p:txBody>
+      </p:sp>
+      <p:sp>
+        <p:nvSpPr>
+          <p:cNvPr id="199" name="FooterBand" descr="Footer: Modeling acts on the reasoning problem, before and during the work. Alignment decides whether the result may acquire consequence."/>
+          <p:cNvSpPr/>
+          <p:nvPr/>
+        </p:nvSpPr>
+        <p:spPr>
+          <a:xfrm>
+            <a:off x="274320" y="5603443"/>
+            <a:ext cx="8595360" cy="777240"/>
+          </a:xfrm>
+          <a:prstGeom prst="rect">
+            <a:avLst/>
+          </a:prstGeom>
+          <a:solidFill>
+            <a:srgbClr val="8E6F3E"/>
+          </a:solidFill>
+          <a:ln>
+            <a:noFill/>
+          </a:ln>
+        </p:spPr>
+        <p:txBody>
+          <a:bodyPr wrap="square" lIns="27432" tIns="22860" rIns="27432" bIns="22860" anchor="ctr"/>
+          <a:lstStyle/>
+          <a:p>
+            <a:pPr algn="ctr">
+              <a:buNone/>
+            </a:pPr>
+            <a:r>
+              <a:rPr lang="en-US" sz="2000" b="1" i="0" dirty="0">
+                <a:solidFill>
+                  <a:srgbClr val="FFFFFF"/>
+                </a:solidFill>
+              </a:rPr>
+              <a:t>Modeling acts on the reasoning problem, before and during the work.</a:t>
+            </a:r>
+          </a:p>
+          <a:p>
+            <a:pPr algn="ctr">
+              <a:spcBef>
+                <a:spcPts val="120"/>
+              </a:spcBef>
+              <a:buNone/>
+            </a:pPr>
+            <a:r>
+              <a:rPr lang="en-US" sz="2000" b="1" i="0" dirty="0">
+                <a:solidFill>
+                  <a:srgbClr val="FFFFFF"/>
+                </a:solidFill>
+              </a:rPr>
+              <a:t>Alignment decides whether the result may acquire consequence.</a:t>
+            </a:r>
+          </a:p>
+        </p:txBody>
+      </p:sp>
+    </p:spTree>
+  </p:cSld>
+  <p:clrMapOvr>
+    <a:masterClrMapping/>
+  </p:clrMapOvr>
+  <p:timing>
+    <p:tnLst>
+      <p:par>
+        <p:cTn id="1" dur="indefinite" restart="never" nodeType="tmRoot">
+          <p:childTnLst>
+            <p:seq concurrent="1" nextAc="seek">
+              <p:cTn id="2" dur="indefinite" nodeType="mainSeq">
+                <p:childTnLst>
+                  <p:par>
+                    <p:cTn id="3" fill="hold">
+                      <p:stCondLst>
+                        <p:cond delay="indefinite"/>
+                      </p:stCondLst>
+                      <p:childTnLst>
+                        <p:par>
+                          <p:cTn id="4" fill="hold">
+                            <p:stCondLst>
+                              <p:cond delay="0"/>
+                            </p:stCondLst>
+                            <p:childTnLst>
+                              <p:par>
+                                <p:cTn id="5" presetID="10" presetClass="entr" presetSubtype="0" fill="hold" nodeType="clickEffect">
+                                  <p:stCondLst>
+                                    <p:cond delay="0"/>
+                                  </p:stCondLst>
+                                  <p:childTnLst>
+                                    <p:set>
+                                      <p:cBhvr>
+                                        <p:cTn id="6" dur="1" fill="hold">
+                                          <p:stCondLst>
+                                            <p:cond delay="0"/>
+                                          </p:stCondLst>
+                                        </p:cTn>
+                                        <p:tgtEl>
+                                          <p:spTgt spid="110"/>
+                                        </p:tgtEl>
+                                        <p:attrNameLst>
+                                          <p:attrName>style.visibility</p:attrName>
+                                        </p:attrNameLst>
+                                      </p:cBhvr>
+                                      <p:to>
+                                        <p:strVal val="visible"/>
+                                      </p:to>
+                                    </p:set>
+                                    <p:animEffect transition="in" filter="fade">
+                                      <p:cBhvr>
+                                        <p:cTn id="7" dur="500"/>
+                                        <p:tgtEl>
+                                          <p:spTgt spid="110"/>
+                                        </p:tgtEl>
+                                      </p:cBhvr>
+                                    </p:animEffect>
+                                  </p:childTnLst>
+                                </p:cTn>
+                              </p:par>
+                              <p:par>
+                                <p:cTn id="8" presetID="10" presetClass="entr" presetSubtype="0" fill="hold" nodeType="withEffect">
+                                  <p:stCondLst>
+                                    <p:cond delay="0"/>
+                                  </p:stCondLst>
+                                  <p:childTnLst>
+                                    <p:set>
+                                      <p:cBhvr>
+                                        <p:cTn id="9" dur="1" fill="hold">
+                                          <p:stCondLst>
+                                            <p:cond delay="0"/>
+                                          </p:stCondLst>
+                                        </p:cTn>
+                                        <p:tgtEl>
+                                          <p:spTgt spid="111"/>
+                                        </p:tgtEl>
+                                        <p:attrNameLst>
+                                          <p:attrName>style.visibility</p:attrName>
+                                        </p:attrNameLst>
+                                      </p:cBhvr>
+                                      <p:to>
+                                        <p:strVal val="visible"/>
+                                      </p:to>
+                                    </p:set>
+                                    <p:animEffect transition="in" filter="fade">
+                                      <p:cBhvr>
+                                        <p:cTn id="10" dur="500"/>
+                                        <p:tgtEl>
+                                          <p:spTgt spid="111"/>
+                                        </p:tgtEl>
+                                      </p:cBhvr>
+                                    </p:animEffect>
+                                  </p:childTnLst>
+                                </p:cTn>
+                              </p:par>
+                              <p:par>
+                                <p:cTn id="11" presetID="10" presetClass="entr" presetSubtype="0" fill="hold" nodeType="withEffect">
+                                  <p:stCondLst>
+                                    <p:cond delay="0"/>
+                                  </p:stCondLst>
+                                  <p:childTnLst>
+                                    <p:set>
+                                      <p:cBhvr>
+                                        <p:cTn id="12" dur="1" fill="hold">
+                                          <p:stCondLst>
+                                            <p:cond delay="0"/>
+                                          </p:stCondLst>
+                                        </p:cTn>
+                                        <p:tgtEl>
+                                          <p:spTgt spid="112"/>
+                                        </p:tgtEl>
+                                        <p:attrNameLst>
+                                          <p:attrName>style.visibility</p:attrName>
+                                        </p:attrNameLst>
+                                      </p:cBhvr>
+                                      <p:to>
+                                        <p:strVal val="visible"/>
+                                      </p:to>
+                                    </p:set>
+                                    <p:animEffect transition="in" filter="fade">
+                                      <p:cBhvr>
+                                        <p:cTn id="13" dur="500"/>
+                                        <p:tgtEl>
+                                          <p:spTgt spid="112"/>
+                                        </p:tgtEl>
+                                      </p:cBhvr>
+                                    </p:animEffect>
+                                  </p:childTnLst>
+                                </p:cTn>
+                              </p:par>
+                            </p:childTnLst>
+                          </p:cTn>
+                        </p:par>
+                      </p:childTnLst>
+                    </p:cTn>
+                  </p:par>
+                  <p:par>
+                    <p:cTn id="14" fill="hold">
+                      <p:stCondLst>
+                        <p:cond delay="indefinite"/>
+                      </p:stCondLst>
+                      <p:childTnLst>
+                        <p:par>
+                          <p:cTn id="15" fill="hold">
+                            <p:stCondLst>
+                              <p:cond delay="0"/>
+                            </p:stCondLst>
+                            <p:childTnLst>
+                              <p:par>
+                                <p:cTn id="16" presetID="10" presetClass="entr" presetSubtype="0" fill="hold" nodeType="clickEffect">
+                                  <p:stCondLst>
+                                    <p:cond delay="0"/>
+                                  </p:stCondLst>
+                                  <p:childTnLst>
+                                    <p:set>
+                                      <p:cBhvr>
+                                        <p:cTn id="17" dur="1" fill="hold">
+                                          <p:stCondLst>
+                                            <p:cond delay="0"/>
+                                          </p:stCondLst>
+                                        </p:cTn>
+                                        <p:tgtEl>
+                                          <p:spTgt spid="120"/>
+                                        </p:tgtEl>
+                                        <p:attrNameLst>
+                                          <p:attrName>style.visibility</p:attrName>
+                                        </p:attrNameLst>
+                                      </p:cBhvr>
+                                      <p:to>
+                                        <p:strVal val="visible"/>
+                                      </p:to>
+                                    </p:set>
+                                    <p:animEffect transition="in" filter="fade">
+                                      <p:cBhvr>
+                                        <p:cTn id="18" dur="500"/>
+                                        <p:tgtEl>
+                                          <p:spTgt spid="120"/>
+                                        </p:tgtEl>
+                                      </p:cBhvr>
+                                    </p:animEffect>
+                                  </p:childTnLst>
+                                </p:cTn>
+                              </p:par>
+                              <p:par>
+                                <p:cTn id="19" presetID="10" presetClass="entr" presetSubtype="0" fill="hold" nodeType="withEffect">
+                                  <p:stCondLst>
+                                    <p:cond delay="0"/>
+                                  </p:stCondLst>
+                                  <p:childTnLst>
+                                    <p:set>
+                                      <p:cBhvr>
+                                        <p:cTn id="20" dur="1" fill="hold">
+                                          <p:stCondLst>
+                                            <p:cond delay="0"/>
+                                          </p:stCondLst>
+                                        </p:cTn>
+                                        <p:tgtEl>
+                                          <p:spTgt spid="121"/>
+                                        </p:tgtEl>
+                                        <p:attrNameLst>
+                                          <p:attrName>style.visibility</p:attrName>
+                                        </p:attrNameLst>
+                                      </p:cBhvr>
+                                      <p:to>
+                                        <p:strVal val="visible"/>
+                                      </p:to>
+                                    </p:set>
+                                    <p:animEffect transition="in" filter="fade">
+                                      <p:cBhvr>
+                                        <p:cTn id="21" dur="500"/>
+                                        <p:tgtEl>
+                                          <p:spTgt spid="121"/>
+                                        </p:tgtEl>
+                                      </p:cBhvr>
+                                    </p:animEffect>
+                                  </p:childTnLst>
+                                </p:cTn>
+                              </p:par>
+                              <p:par>
+                                <p:cTn id="22" presetID="10" presetClass="entr" presetSubtype="0" fill="hold" nodeType="withEffect">
+                                  <p:stCondLst>
+                                    <p:cond delay="0"/>
+                                  </p:stCondLst>
+                                  <p:childTnLst>
+                                    <p:set>
+                                      <p:cBhvr>
+                                        <p:cTn id="23" dur="1" fill="hold">
+                                          <p:stCondLst>
+                                            <p:cond delay="0"/>
+                                          </p:stCondLst>
+                                        </p:cTn>
+                                        <p:tgtEl>
+                                          <p:spTgt spid="124"/>
+                                        </p:tgtEl>
+                                        <p:attrNameLst>
+                                          <p:attrName>style.visibility</p:attrName>
+                                        </p:attrNameLst>
+                                      </p:cBhvr>
+                                      <p:to>
+                                        <p:strVal val="visible"/>
+                                      </p:to>
+                                    </p:set>
+                                    <p:animEffect transition="in" filter="fade">
+                                      <p:cBhvr>
+                                        <p:cTn id="24" dur="500"/>
+                                        <p:tgtEl>
+                                          <p:spTgt spid="124"/>
+                                        </p:tgtEl>
+                                      </p:cBhvr>
+                                    </p:animEffect>
+                                  </p:childTnLst>
+                                </p:cTn>
+                              </p:par>
+                              <p:par>
+                                <p:cTn id="25" presetID="10" presetClass="entr" presetSubtype="0" fill="hold" nodeType="withEffect">
+                                  <p:stCondLst>
+                                    <p:cond delay="0"/>
+                                  </p:stCondLst>
+                                  <p:childTnLst>
+                                    <p:set>
+                                      <p:cBhvr>
+                                        <p:cTn id="26" dur="1" fill="hold">
+                                          <p:stCondLst>
+                                            <p:cond delay="0"/>
+                                          </p:stCondLst>
+                                        </p:cTn>
+                                        <p:tgtEl>
+                                          <p:spTgt spid="122"/>
+                                        </p:tgtEl>
+                                        <p:attrNameLst>
+                                          <p:attrName>style.visibility</p:attrName>
+                                        </p:attrNameLst>
+                                      </p:cBhvr>
+                                      <p:to>
+                                        <p:strVal val="visible"/>
+                                      </p:to>
+                                    </p:set>
+                                    <p:animEffect transition="in" filter="fade">
+                                      <p:cBhvr>
+                                        <p:cTn id="27" dur="500"/>
+                                        <p:tgtEl>
+                                          <p:spTgt spid="122"/>
+                                        </p:tgtEl>
+                                      </p:cBhvr>
+                                    </p:animEffect>
+                                  </p:childTnLst>
+                                </p:cTn>
+                              </p:par>
+                              <p:par>
+                                <p:cTn id="28" presetID="10" presetClass="entr" presetSubtype="0" fill="hold" nodeType="withEffect">
+                                  <p:stCondLst>
+                                    <p:cond delay="0"/>
+                                  </p:stCondLst>
+                                  <p:childTnLst>
+                                    <p:set>
+                                      <p:cBhvr>
+                                        <p:cTn id="29" dur="1" fill="hold">
+                                          <p:stCondLst>
+                                            <p:cond delay="0"/>
+                                          </p:stCondLst>
+                                        </p:cTn>
+                                        <p:tgtEl>
+                                          <p:spTgt spid="123"/>
+                                        </p:tgtEl>
+                                        <p:attrNameLst>
+                                          <p:attrName>style.visibility</p:attrName>
+                                        </p:attrNameLst>
+                                      </p:cBhvr>
+                                      <p:to>
+                                        <p:strVal val="visible"/>
+                                      </p:to>
+                                    </p:set>
+                                    <p:animEffect transition="in" filter="fade">
+                                      <p:cBhvr>
+                                        <p:cTn id="30" dur="500"/>
+                                        <p:tgtEl>
+                                          <p:spTgt spid="123"/>
+                                        </p:tgtEl>
+                                      </p:cBhvr>
+                                    </p:animEffect>
+                                  </p:childTnLst>
+                                </p:cTn>
+                              </p:par>
+                            </p:childTnLst>
+                          </p:cTn>
+                        </p:par>
+                      </p:childTnLst>
+                    </p:cTn>
+                  </p:par>
+                  <p:par>
+                    <p:cTn id="31" fill="hold">
+                      <p:stCondLst>
+                        <p:cond delay="indefinite"/>
+                      </p:stCondLst>
+                      <p:childTnLst>
+                        <p:par>
+                          <p:cTn id="32" fill="hold">
+                            <p:stCondLst>
+                              <p:cond delay="0"/>
+                            </p:stCondLst>
+                            <p:childTnLst>
+                              <p:par>
+                                <p:cTn id="33" presetID="10" presetClass="entr" presetSubtype="0" fill="hold" nodeType="clickEffect">
+                                  <p:stCondLst>
+                                    <p:cond delay="0"/>
+                                  </p:stCondLst>
+                                  <p:childTnLst>
+                                    <p:set>
+                                      <p:cBhvr>
+                                        <p:cTn id="34" dur="1" fill="hold">
+                                          <p:stCondLst>
+                                            <p:cond delay="0"/>
+                                          </p:stCondLst>
+                                        </p:cTn>
+                                        <p:tgtEl>
+                                          <p:spTgt spid="199"/>
+                                        </p:tgtEl>
+                                        <p:attrNameLst>
+                                          <p:attrName>style.visibility</p:attrName>
+                                        </p:attrNameLst>
+                                      </p:cBhvr>
+                                      <p:to>
+                                        <p:strVal val="visible"/>
+                                      </p:to>
+                                    </p:set>
+                                    <p:animEffect transition="in" filter="fade">
+                                      <p:cBhvr>
+                                        <p:cTn id="35" dur="500"/>
+                                        <p:tgtEl>
+                                          <p:spTgt spid="199"/>
+                                        </p:tgtEl>
+                                      </p:cBhvr>
+                                    </p:animEffect>
+                                  </p:childTnLst>
+                                </p:cTn>
+                              </p:par>
+                            </p:childTnLst>
+                          </p:cTn>
+                        </p:par>
+                      </p:childTnLst>
+                    </p:cTn>
+                  </p:par>
+                </p:childTnLst>
+              </p:cTn>
+              <p:prevCondLst>
+                <p:cond evt="onPrev" delay="0">
+                  <p:tgtEl>
+                    <p:sldTgt/>
+                  </p:tgtEl>
+                </p:cond>
+              </p:prevCondLst>
+              <p:nextCondLst>
+                <p:cond evt="onNext" delay="0">
+                  <p:tgtEl>
+                    <p:sldTgt/>
+                  </p:tgtEl>
+                </p:cond>
+              </p:nextCondLst>
+            </p:seq>
+          </p:childTnLst>
+        </p:cTn>
+      </p:par>
+    </p:tnLst>
+  </p:timing>
 </p:sld>
 </file>
 

--- a/course/lectures/act-2-delegation-and-control/01-delegation/2-1-Agents.pptx
+++ b/course/lectures/act-2-delegation-and-control/01-delegation/2-1-Agents.pptx
@@ -40,7 +40,6 @@
     <p:sldId id="730" r:id="rId31"/>
     <p:sldId id="731" r:id="rId32"/>
     <p:sldId id="732" r:id="rId33"/>
-    <p:sldId id="735" r:id="rId41"/>
     <p:sldId id="733" r:id="rId34"/>
     <p:sldId id="734" r:id="rId35"/>
   </p:sldIdLst>
@@ -2505,12 +2504,6 @@
               <a:t>- Closing line: agents change who can perform realization; the rest of Act II asks how engineering retains informed control.</a:t>
             </a:r>
           </a:p>
-          <a:p>
-            <a:r>
-              <a:rPr dirty="0"/>
-              <a:t>- Point back one slide: these three questions now have a place to live on the picture. Modeling and Alignment are the two annotations; failure-aware engineering is what you do when the artifact that passed turns out to be wrong.</a:t>
-            </a:r>
-          </a:p>
         </p:txBody>
       </p:sp>
     </p:spTree>
@@ -2584,122 +2577,6 @@
             </a:r>
           </a:p>
         </p:txBody>
-      </p:sp>
-    </p:spTree>
-  </p:cSld>
-  <p:clrMapOvr>
-    <a:masterClrMapping/>
-  </p:clrMapOvr>
-</p:notes>
-</file>
-
-<file path=ppt/notesSlides/notesSlide35.xml><?xml version="1.0" encoding="utf-8"?>
-<p:notes xmlns:a="http://schemas.openxmlformats.org/drawingml/2006/main" xmlns:p="http://schemas.openxmlformats.org/presentationml/2006/main" xmlns:r="http://schemas.openxmlformats.org/officeDocument/2006/relationships">
-  <p:cSld>
-    <p:spTree>
-      <p:nvGrpSpPr>
-        <p:cNvPr id="1" name=""/>
-        <p:cNvGrpSpPr/>
-        <p:nvPr/>
-      </p:nvGrpSpPr>
-      <p:grpSpPr>
-        <a:xfrm>
-          <a:off x="0" y="0"/>
-          <a:ext cx="0" cy="0"/>
-          <a:chOff x="0" y="0"/>
-          <a:chExt cx="0" cy="0"/>
-        </a:xfrm>
-      </p:grpSpPr>
-      <p:sp>
-        <p:nvSpPr>
-          <p:cNvPr id="2" name="Slide Image Placeholder 1"/>
-          <p:cNvSpPr>
-            <a:spLocks noGrp="1"/>
-          </p:cNvSpPr>
-          <p:nvPr>
-            <p:ph type="sldImg" idx="2"/>
-          </p:nvPr>
-        </p:nvSpPr>
-        <p:spPr/>
-      </p:sp>
-      <p:sp>
-        <p:nvSpPr>
-          <p:cNvPr id="3" name="Notes Placeholder 2"/>
-          <p:cNvSpPr>
-            <a:spLocks noGrp="1"/>
-          </p:cNvSpPr>
-          <p:nvPr>
-            <p:ph type="body" idx="3" sz="quarter"/>
-          </p:nvPr>
-        </p:nvSpPr>
-        <p:spPr/>
-        <p:txBody>
-          <a:bodyPr/>
-          <a:lstStyle/>
-          <a:p>
-            <a:r>
-              <a:t>1.5 minutes — The answer to the question you just asked, in one picture: the agent sits inside an engineered environment.</a:t>
-            </a:r>
-          </a:p>
-          <a:p/>
-          <a:p>
-            <a:r>
-              <a:t>- This is the master picture for the rest of Act II. Here it is entirely qualitative. Modeling and Alignment bring it back and put numbers on it.</a:t>
-            </a:r>
-          </a:p>
-          <a:p>
-            <a:r>
-              <a:t>- The path first. A task enters, a reasoner works, an artifact comes out. Nothing on this row is new; you have seen every piece of it today.</a:t>
-            </a:r>
-          </a:p>
-          <a:p>
-            <a:r>
-              <a:t>- Click one. MODELS is the one station drawn with a heavy rim, and its arrow enters the path BEFORE the reasoner runs. That is the whole claim of the next lecture: what the models carry sets the reasoning surface the agent gets to work on.</a:t>
-            </a:r>
-          </a:p>
-          <a:p>
-            <a:r>
-              <a:t>- Click two. ALIGNMENT is the only annotation whose arrow crosses the boundary of the environment. Something has to govern whether the artifact may leave and acquire consequence.</a:t>
-            </a:r>
-          </a:p>
-          <a:p>
-            <a:r>
-              <a:t>- Say the two jobs aloud, in these words: Modeling acts on the reasoning problem, before and during the work; Alignment acts on whether the result may acquire consequence.</a:t>
-            </a:r>
-          </a:p>
-          <a:p>
-            <a:r>
-              <a:t>- Both are OUTSIDE the agent. That is the answer to the slide you just left: the engineering knowledge that must persist, and the obligations the environment enforces.</a:t>
-            </a:r>
-          </a:p>
-          <a:p>
-            <a:r>
-              <a:t>- The colour code belongs to this PICTURE, not to the deck: red is Modeling's lever, blue is Alignment's, and it returns whenever the picture returns. The gold chips on the next slide are the deck's ordinary chrome, not a contradiction. Nothing here rests on colour alone — the words carry it, and so does the drawing: Modeling's stroke is solid and lands on the path, Alignment's are dashed because passage is conditional, and only Alignment's crosses the boundary.</a:t>
-            </a:r>
-          </a:p>
-          <a:p>
-            <a:r>
-              <a:t>- Leave the space under the station row empty and do not fill it. In Modeling that is exactly where the arithmetic arrives.</a:t>
-            </a:r>
-          </a:p>
-          <a:p>
-            <a:r>
-              <a:t>- Do not answer the think-pair-share questions here. Show the shape of the answer, then move on.</a:t>
-            </a:r>
-          </a:p>
-        </p:txBody>
-      </p:sp>
-      <p:sp>
-        <p:nvSpPr>
-          <p:cNvPr id="4" name="Slide Number Placeholder 3"/>
-          <p:cNvSpPr>
-            <a:spLocks noGrp="1"/>
-          </p:cNvSpPr>
-          <p:nvPr>
-            <p:ph type="sldNum" idx="5" sz="quarter"/>
-          </p:nvPr>
-        </p:nvSpPr>
-        <p:spPr/>
       </p:sp>
     </p:spTree>
   </p:cSld>
@@ -25268,1087 +25145,6 @@
   <p:clrMapOvr>
     <a:masterClrMapping/>
   </p:clrMapOvr>
-</p:sld>
-</file>
-
-<file path=ppt/slides/slide35.xml><?xml version="1.0" encoding="utf-8"?>
-<p:sld xmlns:a="http://schemas.openxmlformats.org/drawingml/2006/main" xmlns:p="http://schemas.openxmlformats.org/presentationml/2006/main" xmlns:r="http://schemas.openxmlformats.org/officeDocument/2006/relationships">
-  <p:cSld>
-    <p:spTree>
-      <p:nvGrpSpPr>
-        <p:cNvPr id="1" name=""/>
-        <p:cNvGrpSpPr/>
-        <p:nvPr/>
-      </p:nvGrpSpPr>
-      <p:grpSpPr/>
-      <p:sp>
-        <p:nvSpPr>
-          <p:cNvPr id="2" name="Title 1"/>
-          <p:cNvSpPr>
-            <a:spLocks noGrp="1"/>
-          </p:cNvSpPr>
-          <p:nvPr>
-            <p:ph type="title"/>
-          </p:nvPr>
-        </p:nvSpPr>
-        <p:spPr>
-          <a:xfrm>
-            <a:off x="277148" y="118428"/>
-            <a:ext cx="8590000" cy="638175"/>
-          </a:xfrm>
-        </p:spPr>
-        <p:txBody>
-          <a:bodyPr>
-            <a:normAutofit fontScale="90000"/>
-          </a:bodyPr>
-          <a:lstStyle/>
-          <a:p>
-            <a:pPr>
-              <a:buNone/>
-              <a:defRPr b="0"/>
-            </a:pPr>
-            <a:r>
-              <a:rPr lang="en-US" sz="2400" b="0" i="0" dirty="0">
-                <a:solidFill>
-                  <a:srgbClr val="000000"/>
-                </a:solidFill>
-              </a:rPr>
-              <a:t>The agent works inside an engineered environment</a:t>
-            </a:r>
-          </a:p>
-        </p:txBody>
-      </p:sp>
-      <p:sp>
-        <p:nvSpPr>
-          <p:cNvPr id="3" name="Slide Number Placeholder 3"/>
-          <p:cNvSpPr>
-            <a:spLocks noGrp="1"/>
-          </p:cNvSpPr>
-          <p:nvPr>
-            <p:ph type="sldNum" sz="quarter" idx="4"/>
-          </p:nvPr>
-        </p:nvSpPr>
-        <p:spPr/>
-        <p:txBody>
-          <a:bodyPr/>
-          <a:lstStyle/>
-          <a:p>
-            <a:fld id="{B7EB45DA-9A0D-DC49-8E02-F30A5DDC21C3}" type="slidenum">
-              <a:rPr lang="en-US" smtClean="0"/>
-              <a:t>1</a:t>
-            </a:fld>
-            <a:endParaRPr lang="en-US"/>
-          </a:p>
-        </p:txBody>
-      </p:sp>
-      <p:sp>
-        <p:nvSpPr>
-          <p:cNvPr id="100" name="Env" descr="Enclosure labelled ENGINEERING ENVIRONMENT containing the whole delegation path: a task enters, a reasoner works, an artifact comes out, and a models station feeds the path before the reasoner runs."/>
-          <p:cNvSpPr/>
-          <p:nvPr/>
-        </p:nvSpPr>
-        <p:spPr>
-          <a:xfrm>
-            <a:off x="274320" y="896112"/>
-            <a:ext cx="7498080" cy="4370832"/>
-          </a:xfrm>
-          <a:prstGeom prst="rect">
-            <a:avLst/>
-          </a:prstGeom>
-          <a:noFill/>
-          <a:ln w="25400">
-            <a:solidFill>
-              <a:srgbClr val="8E6F3E"/>
-            </a:solidFill>
-          </a:ln>
-        </p:spPr>
-        <p:txBody>
-          <a:bodyPr/>
-          <a:lstStyle/>
-          <a:p>
-            <a:endParaRPr/>
-          </a:p>
-        </p:txBody>
-      </p:sp>
-      <p:sp>
-        <p:nvSpPr>
-          <p:cNvPr id="101" name="EnvLbl" descr="Label: ENGINEERING ENVIRONMENT"/>
-          <p:cNvSpPr txBox="1"/>
-          <p:nvPr/>
-        </p:nvSpPr>
-        <p:spPr>
-          <a:xfrm>
-            <a:off x="548640" y="969264"/>
-            <a:ext cx="6949440" cy="384048"/>
-          </a:xfrm>
-          <a:prstGeom prst="rect">
-            <a:avLst/>
-          </a:prstGeom>
-          <a:noFill/>
-          <a:ln>
-            <a:noFill/>
-          </a:ln>
-        </p:spPr>
-        <p:txBody>
-          <a:bodyPr wrap="square" lIns="0" tIns="0" rIns="0" bIns="0" anchor="ctr"/>
-          <a:lstStyle/>
-          <a:p>
-            <a:pPr algn="ctr">
-              <a:buNone/>
-            </a:pPr>
-            <a:r>
-              <a:rPr lang="en-US" sz="2000" b="1" i="0" dirty="0">
-                <a:solidFill>
-                  <a:srgbClr val="8E6F3E"/>
-                </a:solidFill>
-              </a:rPr>
-              <a:t>ENGINEERING ENVIRONMENT</a:t>
-            </a:r>
-          </a:p>
-        </p:txBody>
-      </p:sp>
-      <p:sp>
-        <p:nvSpPr>
-          <p:cNvPr id="102" name="Task" descr="Station 1 of 4: TASK, what we want done."/>
-          <p:cNvSpPr/>
-          <p:nvPr/>
-        </p:nvSpPr>
-        <p:spPr>
-          <a:xfrm>
-            <a:off x="548640" y="3438144"/>
-            <a:ext cx="1645920" cy="731520"/>
-          </a:xfrm>
-          <a:prstGeom prst="rect">
-            <a:avLst/>
-          </a:prstGeom>
-          <a:solidFill>
-            <a:srgbClr val="F5F1E8"/>
-          </a:solidFill>
-          <a:ln w="19050">
-            <a:solidFill>
-              <a:srgbClr val="C9B991"/>
-            </a:solidFill>
-          </a:ln>
-        </p:spPr>
-        <p:txBody>
-          <a:bodyPr wrap="square" lIns="27432" tIns="22860" rIns="27432" bIns="22860" anchor="ctr"/>
-          <a:lstStyle/>
-          <a:p>
-            <a:pPr algn="ctr">
-              <a:buNone/>
-            </a:pPr>
-            <a:r>
-              <a:rPr lang="en-US" sz="1800" b="1" i="0" dirty="0">
-                <a:solidFill>
-                  <a:srgbClr val="5C4826"/>
-                </a:solidFill>
-              </a:rPr>
-              <a:t>TASK</a:t>
-            </a:r>
-          </a:p>
-        </p:txBody>
-      </p:sp>
-      <p:cxnSp>
-        <p:nvCxnSpPr>
-          <p:cNvPr id="103" name="Conn1" descr="Arrow from TASK to REASONER; the models station feeds this segment."/>
-          <p:cNvCxnSpPr/>
-          <p:nvPr/>
-        </p:nvCxnSpPr>
-        <p:spPr>
-          <a:xfrm>
-            <a:off x="2258568" y="3803904"/>
-            <a:ext cx="886968" cy="0"/>
-          </a:xfrm>
-          <a:prstGeom prst="straightConnector1">
-            <a:avLst/>
-          </a:prstGeom>
-          <a:ln w="34925">
-            <a:solidFill>
-              <a:srgbClr val="8E6F3E"/>
-            </a:solidFill>
-            <a:tailEnd type="triangle" w="lg" len="lg"/>
-          </a:ln>
-        </p:spPr>
-      </p:cxnSp>
-      <p:sp>
-        <p:nvSpPr>
-          <p:cNvPr id="104" name="Reasoner" descr="Station 3 of 4: REASONER, what does the work."/>
-          <p:cNvSpPr/>
-          <p:nvPr/>
-        </p:nvSpPr>
-        <p:spPr>
-          <a:xfrm>
-            <a:off x="3200400" y="3438144"/>
-            <a:ext cx="1645920" cy="731520"/>
-          </a:xfrm>
-          <a:prstGeom prst="rect">
-            <a:avLst/>
-          </a:prstGeom>
-          <a:solidFill>
-            <a:srgbClr val="F5F1E8"/>
-          </a:solidFill>
-          <a:ln w="19050">
-            <a:solidFill>
-              <a:srgbClr val="C9B991"/>
-            </a:solidFill>
-          </a:ln>
-        </p:spPr>
-        <p:txBody>
-          <a:bodyPr wrap="square" lIns="27432" tIns="22860" rIns="27432" bIns="22860" anchor="ctr"/>
-          <a:lstStyle/>
-          <a:p>
-            <a:pPr algn="ctr">
-              <a:buNone/>
-            </a:pPr>
-            <a:r>
-              <a:rPr lang="en-US" sz="1800" b="1" i="0" dirty="0">
-                <a:solidFill>
-                  <a:srgbClr val="5C4826"/>
-                </a:solidFill>
-              </a:rPr>
-              <a:t>REASONER</a:t>
-            </a:r>
-          </a:p>
-        </p:txBody>
-      </p:sp>
-      <p:sp>
-        <p:nvSpPr>
-          <p:cNvPr id="105" name="RealLbl" descr="Label on the arrow from REASONER to ARTIFACT: realization."/>
-          <p:cNvSpPr txBox="1"/>
-          <p:nvPr/>
-        </p:nvSpPr>
-        <p:spPr>
-          <a:xfrm>
-            <a:off x="4846320" y="3456432"/>
-            <a:ext cx="1005840" cy="292608"/>
-          </a:xfrm>
-          <a:prstGeom prst="rect">
-            <a:avLst/>
-          </a:prstGeom>
-          <a:noFill/>
-          <a:ln>
-            <a:noFill/>
-          </a:ln>
-        </p:spPr>
-        <p:txBody>
-          <a:bodyPr wrap="none" lIns="0" tIns="0" rIns="0" bIns="0" anchor="ctr"/>
-          <a:lstStyle/>
-          <a:p>
-            <a:pPr algn="ctr">
-              <a:buNone/>
-            </a:pPr>
-            <a:r>
-              <a:rPr lang="en-US" sz="1500" b="0" i="1" dirty="0">
-                <a:solidFill>
-                  <a:srgbClr val="555960"/>
-                </a:solidFill>
-              </a:rPr>
-              <a:t>realization</a:t>
-            </a:r>
-          </a:p>
-        </p:txBody>
-      </p:sp>
-      <p:cxnSp>
-        <p:nvCxnSpPr>
-          <p:cNvPr id="106" name="Conn2" descr="Arrow from REASONER to ARTIFACT, labelled realization."/>
-          <p:cNvCxnSpPr/>
-          <p:nvPr/>
-        </p:nvCxnSpPr>
-        <p:spPr>
-          <a:xfrm>
-            <a:off x="4910328" y="3803904"/>
-            <a:ext cx="886968" cy="0"/>
-          </a:xfrm>
-          <a:prstGeom prst="straightConnector1">
-            <a:avLst/>
-          </a:prstGeom>
-          <a:ln w="34925">
-            <a:solidFill>
-              <a:srgbClr val="8E6F3E"/>
-            </a:solidFill>
-            <a:tailEnd type="triangle" w="lg" len="lg"/>
-          </a:ln>
-        </p:spPr>
-      </p:cxnSp>
-      <p:sp>
-        <p:nvSpPr>
-          <p:cNvPr id="107" name="Artifact" descr="Station 4 of 4: ARTIFACT, what comes out."/>
-          <p:cNvSpPr/>
-          <p:nvPr/>
-        </p:nvSpPr>
-        <p:spPr>
-          <a:xfrm>
-            <a:off x="5852160" y="3438144"/>
-            <a:ext cx="1645920" cy="731520"/>
-          </a:xfrm>
-          <a:prstGeom prst="rect">
-            <a:avLst/>
-          </a:prstGeom>
-          <a:solidFill>
-            <a:srgbClr val="F5F1E8"/>
-          </a:solidFill>
-          <a:ln w="19050">
-            <a:solidFill>
-              <a:srgbClr val="C9B991"/>
-            </a:solidFill>
-          </a:ln>
-        </p:spPr>
-        <p:txBody>
-          <a:bodyPr wrap="square" lIns="27432" tIns="22860" rIns="27432" bIns="22860" anchor="ctr"/>
-          <a:lstStyle/>
-          <a:p>
-            <a:pPr algn="ctr">
-              <a:buNone/>
-            </a:pPr>
-            <a:r>
-              <a:rPr lang="en-US" sz="1800" b="1" i="0" dirty="0">
-                <a:solidFill>
-                  <a:srgbClr val="5C4826"/>
-                </a:solidFill>
-              </a:rPr>
-              <a:t>ARTIFACT</a:t>
-            </a:r>
-          </a:p>
-        </p:txBody>
-      </p:sp>
-      <p:sp>
-        <p:nvSpPr>
-          <p:cNvPr id="110" name="ModAnn" descr="Annotation, left: MODELING changes the reasoning surface."/>
-          <p:cNvSpPr txBox="1"/>
-          <p:nvPr/>
-        </p:nvSpPr>
-        <p:spPr>
-          <a:xfrm>
-            <a:off x="1143000" y="1399032"/>
-            <a:ext cx="3108960" cy="640080"/>
-          </a:xfrm>
-          <a:prstGeom prst="rect">
-            <a:avLst/>
-          </a:prstGeom>
-          <a:noFill/>
-          <a:ln>
-            <a:noFill/>
-          </a:ln>
-        </p:spPr>
-        <p:txBody>
-          <a:bodyPr wrap="square" lIns="0" tIns="0" rIns="0" bIns="0" anchor="ctr"/>
-          <a:lstStyle/>
-          <a:p>
-            <a:pPr algn="ctr">
-              <a:buNone/>
-            </a:pPr>
-            <a:r>
-              <a:rPr lang="en-US" sz="1800" b="1" i="0" dirty="0">
-                <a:solidFill>
-                  <a:srgbClr val="C8102E"/>
-                </a:solidFill>
-              </a:rPr>
-              <a:t>MODELING</a:t>
-            </a:r>
-          </a:p>
-          <a:p>
-            <a:pPr algn="ctr">
-              <a:spcBef>
-                <a:spcPts val="120"/>
-              </a:spcBef>
-              <a:buNone/>
-            </a:pPr>
-            <a:r>
-              <a:rPr lang="en-US" sz="1500" b="0" i="1" dirty="0">
-                <a:solidFill>
-                  <a:srgbClr val="555960"/>
-                </a:solidFill>
-              </a:rPr>
-              <a:t>changes the reasoning surface</a:t>
-            </a:r>
-          </a:p>
-        </p:txBody>
-      </p:sp>
-      <p:sp>
-        <p:nvSpPr>
-          <p:cNvPr id="111" name="Models" descr="Station 2 of 4, drawn with the heavy rim because it is the one station this lecture pair is about: MODELS, the representation."/>
-          <p:cNvSpPr/>
-          <p:nvPr/>
-        </p:nvSpPr>
-        <p:spPr>
-          <a:xfrm>
-            <a:off x="1874520" y="2148840"/>
-            <a:ext cx="1645920" cy="731520"/>
-          </a:xfrm>
-          <a:prstGeom prst="rect">
-            <a:avLst/>
-          </a:prstGeom>
-          <a:solidFill>
-            <a:srgbClr val="FFFFFF"/>
-          </a:solidFill>
-          <a:ln w="28575">
-            <a:solidFill>
-              <a:srgbClr val="8E6F3E"/>
-            </a:solidFill>
-          </a:ln>
-        </p:spPr>
-        <p:txBody>
-          <a:bodyPr wrap="square" lIns="27432" tIns="22860" rIns="27432" bIns="22860" anchor="ctr"/>
-          <a:lstStyle/>
-          <a:p>
-            <a:pPr algn="ctr">
-              <a:buNone/>
-            </a:pPr>
-            <a:r>
-              <a:rPr lang="en-US" sz="1800" b="1" i="0" dirty="0">
-                <a:solidFill>
-                  <a:srgbClr val="5C4826"/>
-                </a:solidFill>
-              </a:rPr>
-              <a:t>MODELS</a:t>
-            </a:r>
-          </a:p>
-        </p:txBody>
-      </p:sp>
-      <p:cxnSp>
-        <p:nvCxnSpPr>
-          <p:cNvPr id="112" name="ModArrow" descr="Modeling's lever, one solid stroke ending in an arrowhead that lands on the segment between TASK and REASONER: the representation is on the path before the reasoner ever runs."/>
-          <p:cNvCxnSpPr/>
-          <p:nvPr/>
-        </p:nvCxnSpPr>
-        <p:spPr>
-          <a:xfrm>
-            <a:off x="2697480" y="2916936"/>
-            <a:ext cx="0" cy="877824"/>
-          </a:xfrm>
-          <a:prstGeom prst="straightConnector1">
-            <a:avLst/>
-          </a:prstGeom>
-          <a:ln w="34925">
-            <a:solidFill>
-              <a:srgbClr val="C8102E"/>
-            </a:solidFill>
-            <a:tailEnd type="triangle" w="lg" len="lg"/>
-          </a:ln>
-        </p:spPr>
-      </p:cxnSp>
-      <p:sp>
-        <p:nvSpPr>
-          <p:cNvPr id="120" name="AlnAnn" descr="Annotation, right: ALIGNMENT governs what may pass."/>
-          <p:cNvSpPr txBox="1"/>
-          <p:nvPr/>
-        </p:nvSpPr>
-        <p:spPr>
-          <a:xfrm>
-            <a:off x="5440680" y="1399032"/>
-            <a:ext cx="2468880" cy="640080"/>
-          </a:xfrm>
-          <a:prstGeom prst="rect">
-            <a:avLst/>
-          </a:prstGeom>
-          <a:noFill/>
-          <a:ln>
-            <a:noFill/>
-          </a:ln>
-        </p:spPr>
-        <p:txBody>
-          <a:bodyPr wrap="square" lIns="0" tIns="0" rIns="0" bIns="0" anchor="ctr"/>
-          <a:lstStyle/>
-          <a:p>
-            <a:pPr algn="ctr">
-              <a:buNone/>
-            </a:pPr>
-            <a:r>
-              <a:rPr lang="en-US" sz="1800" b="1" i="0" dirty="0">
-                <a:solidFill>
-                  <a:srgbClr val="2E74B5"/>
-                </a:solidFill>
-              </a:rPr>
-              <a:t>ALIGNMENT</a:t>
-            </a:r>
-          </a:p>
-          <a:p>
-            <a:pPr algn="ctr">
-              <a:spcBef>
-                <a:spcPts val="120"/>
-              </a:spcBef>
-              <a:buNone/>
-            </a:pPr>
-            <a:r>
-              <a:rPr lang="en-US" sz="1500" b="0" i="1" dirty="0">
-                <a:solidFill>
-                  <a:srgbClr val="555960"/>
-                </a:solidFill>
-              </a:rPr>
-              <a:t>governs what may pass</a:t>
-            </a:r>
-          </a:p>
-        </p:txBody>
-      </p:sp>
-      <p:cxnSp>
-        <p:nvCxnSpPr>
-          <p:cNvPr id="121" name="AlnArrow" descr="Alignment's gate, part one: a solid stroke down from the annotation onto the ARTIFACT. It ends in a bar rather than an arrowhead because the gate always acts."/>
-          <p:cNvCxnSpPr/>
-          <p:nvPr/>
-        </p:nvCxnSpPr>
-        <p:spPr>
-          <a:xfrm>
-            <a:off x="6675120" y="2148840"/>
-            <a:ext cx="0" cy="1261872"/>
-          </a:xfrm>
-          <a:prstGeom prst="straightConnector1">
-            <a:avLst/>
-          </a:prstGeom>
-          <a:ln w="34925">
-            <a:solidFill>
-              <a:srgbClr val="2E74B5"/>
-            </a:solidFill>
-          </a:ln>
-        </p:spPr>
-      </p:cxnSp>
-      <p:sp>
-        <p:nvSpPr>
-          <p:cNvPr id="124" name="AlnGate" descr="Alignment's gate, part two: a bar laid across the top edge of the ARTIFACT, the checkpoint every realization is judged at."/>
-          <p:cNvSpPr/>
-          <p:nvPr/>
-        </p:nvSpPr>
-        <p:spPr>
-          <a:xfrm>
-            <a:off x="6263640" y="3406140"/>
-            <a:ext cx="822960" cy="64008"/>
-          </a:xfrm>
-          <a:prstGeom prst="rect">
-            <a:avLst/>
-          </a:prstGeom>
-          <a:solidFill>
-            <a:srgbClr val="2E74B5"/>
-          </a:solidFill>
-          <a:ln>
-            <a:noFill/>
-          </a:ln>
-        </p:spPr>
-        <p:txBody>
-          <a:bodyPr/>
-          <a:lstStyle/>
-          <a:p>
-            <a:endParaRPr/>
-          </a:p>
-        </p:txBody>
-      </p:sp>
-      <p:cxnSp>
-        <p:nvCxnSpPr>
-          <p:cNvPr id="122" name="ExitArrow" descr="The egress, and the only stroke that crosses the environment's boundary. It is dashed because that passage is the one conditional thing in the picture: the artifact leaves the engineering environment and acquires consequence only if Alignment's gate lets it."/>
-          <p:cNvCxnSpPr/>
-          <p:nvPr/>
-        </p:nvCxnSpPr>
-        <p:spPr>
-          <a:xfrm>
-            <a:off x="7562088" y="3803904"/>
-            <a:ext cx="1170432" cy="0"/>
-          </a:xfrm>
-          <a:prstGeom prst="straightConnector1">
-            <a:avLst/>
-          </a:prstGeom>
-          <a:ln w="34925">
-            <a:solidFill>
-              <a:srgbClr val="2E74B5"/>
-            </a:solidFill>
-            <a:prstDash val="dash"/>
-            <a:tailEnd type="triangle" w="lg" len="lg"/>
-          </a:ln>
-        </p:spPr>
-      </p:cxnSp>
-      <p:sp>
-        <p:nvSpPr>
-          <p:cNvPr id="123" name="ExitLbl" descr="Label on the arrow leaving the environment: consequence."/>
-          <p:cNvSpPr txBox="1"/>
-          <p:nvPr/>
-        </p:nvSpPr>
-        <p:spPr>
-          <a:xfrm>
-            <a:off x="7891272" y="3456432"/>
-            <a:ext cx="978408" cy="292608"/>
-          </a:xfrm>
-          <a:prstGeom prst="rect">
-            <a:avLst/>
-          </a:prstGeom>
-          <a:noFill/>
-          <a:ln>
-            <a:noFill/>
-          </a:ln>
-        </p:spPr>
-        <p:txBody>
-          <a:bodyPr wrap="none" lIns="0" tIns="0" rIns="0" bIns="0" anchor="ctr"/>
-          <a:lstStyle/>
-          <a:p>
-            <a:pPr algn="ctr">
-              <a:buNone/>
-            </a:pPr>
-            <a:r>
-              <a:rPr lang="en-US" sz="1500" b="0" i="1" dirty="0">
-                <a:solidFill>
-                  <a:srgbClr val="555960"/>
-                </a:solidFill>
-              </a:rPr>
-              <a:t>consequence</a:t>
-            </a:r>
-          </a:p>
-        </p:txBody>
-      </p:sp>
-      <p:sp>
-        <p:nvSpPr>
-          <p:cNvPr id="199" name="FooterBand" descr="Footer: Modeling acts on the reasoning problem, before and during the work. Alignment decides whether the result may acquire consequence."/>
-          <p:cNvSpPr/>
-          <p:nvPr/>
-        </p:nvSpPr>
-        <p:spPr>
-          <a:xfrm>
-            <a:off x="274320" y="5603443"/>
-            <a:ext cx="8595360" cy="777240"/>
-          </a:xfrm>
-          <a:prstGeom prst="rect">
-            <a:avLst/>
-          </a:prstGeom>
-          <a:solidFill>
-            <a:srgbClr val="8E6F3E"/>
-          </a:solidFill>
-          <a:ln>
-            <a:noFill/>
-          </a:ln>
-        </p:spPr>
-        <p:txBody>
-          <a:bodyPr wrap="square" lIns="27432" tIns="22860" rIns="27432" bIns="22860" anchor="ctr"/>
-          <a:lstStyle/>
-          <a:p>
-            <a:pPr algn="ctr">
-              <a:buNone/>
-            </a:pPr>
-            <a:r>
-              <a:rPr lang="en-US" sz="2000" b="1" i="0" dirty="0">
-                <a:solidFill>
-                  <a:srgbClr val="FFFFFF"/>
-                </a:solidFill>
-              </a:rPr>
-              <a:t>Modeling acts on the reasoning problem, before and during the work.</a:t>
-            </a:r>
-          </a:p>
-          <a:p>
-            <a:pPr algn="ctr">
-              <a:spcBef>
-                <a:spcPts val="120"/>
-              </a:spcBef>
-              <a:buNone/>
-            </a:pPr>
-            <a:r>
-              <a:rPr lang="en-US" sz="2000" b="1" i="0" dirty="0">
-                <a:solidFill>
-                  <a:srgbClr val="FFFFFF"/>
-                </a:solidFill>
-              </a:rPr>
-              <a:t>Alignment decides whether the result may acquire consequence.</a:t>
-            </a:r>
-          </a:p>
-        </p:txBody>
-      </p:sp>
-    </p:spTree>
-  </p:cSld>
-  <p:clrMapOvr>
-    <a:masterClrMapping/>
-  </p:clrMapOvr>
-  <p:timing>
-    <p:tnLst>
-      <p:par>
-        <p:cTn id="1" dur="indefinite" restart="never" nodeType="tmRoot">
-          <p:childTnLst>
-            <p:seq concurrent="1" nextAc="seek">
-              <p:cTn id="2" dur="indefinite" nodeType="mainSeq">
-                <p:childTnLst>
-                  <p:par>
-                    <p:cTn id="3" fill="hold">
-                      <p:stCondLst>
-                        <p:cond delay="indefinite"/>
-                      </p:stCondLst>
-                      <p:childTnLst>
-                        <p:par>
-                          <p:cTn id="4" fill="hold">
-                            <p:stCondLst>
-                              <p:cond delay="0"/>
-                            </p:stCondLst>
-                            <p:childTnLst>
-                              <p:par>
-                                <p:cTn id="5" presetID="10" presetClass="entr" presetSubtype="0" fill="hold" nodeType="clickEffect">
-                                  <p:stCondLst>
-                                    <p:cond delay="0"/>
-                                  </p:stCondLst>
-                                  <p:childTnLst>
-                                    <p:set>
-                                      <p:cBhvr>
-                                        <p:cTn id="6" dur="1" fill="hold">
-                                          <p:stCondLst>
-                                            <p:cond delay="0"/>
-                                          </p:stCondLst>
-                                        </p:cTn>
-                                        <p:tgtEl>
-                                          <p:spTgt spid="110"/>
-                                        </p:tgtEl>
-                                        <p:attrNameLst>
-                                          <p:attrName>style.visibility</p:attrName>
-                                        </p:attrNameLst>
-                                      </p:cBhvr>
-                                      <p:to>
-                                        <p:strVal val="visible"/>
-                                      </p:to>
-                                    </p:set>
-                                    <p:animEffect transition="in" filter="fade">
-                                      <p:cBhvr>
-                                        <p:cTn id="7" dur="500"/>
-                                        <p:tgtEl>
-                                          <p:spTgt spid="110"/>
-                                        </p:tgtEl>
-                                      </p:cBhvr>
-                                    </p:animEffect>
-                                  </p:childTnLst>
-                                </p:cTn>
-                              </p:par>
-                              <p:par>
-                                <p:cTn id="8" presetID="10" presetClass="entr" presetSubtype="0" fill="hold" nodeType="withEffect">
-                                  <p:stCondLst>
-                                    <p:cond delay="0"/>
-                                  </p:stCondLst>
-                                  <p:childTnLst>
-                                    <p:set>
-                                      <p:cBhvr>
-                                        <p:cTn id="9" dur="1" fill="hold">
-                                          <p:stCondLst>
-                                            <p:cond delay="0"/>
-                                          </p:stCondLst>
-                                        </p:cTn>
-                                        <p:tgtEl>
-                                          <p:spTgt spid="111"/>
-                                        </p:tgtEl>
-                                        <p:attrNameLst>
-                                          <p:attrName>style.visibility</p:attrName>
-                                        </p:attrNameLst>
-                                      </p:cBhvr>
-                                      <p:to>
-                                        <p:strVal val="visible"/>
-                                      </p:to>
-                                    </p:set>
-                                    <p:animEffect transition="in" filter="fade">
-                                      <p:cBhvr>
-                                        <p:cTn id="10" dur="500"/>
-                                        <p:tgtEl>
-                                          <p:spTgt spid="111"/>
-                                        </p:tgtEl>
-                                      </p:cBhvr>
-                                    </p:animEffect>
-                                  </p:childTnLst>
-                                </p:cTn>
-                              </p:par>
-                              <p:par>
-                                <p:cTn id="11" presetID="10" presetClass="entr" presetSubtype="0" fill="hold" nodeType="withEffect">
-                                  <p:stCondLst>
-                                    <p:cond delay="0"/>
-                                  </p:stCondLst>
-                                  <p:childTnLst>
-                                    <p:set>
-                                      <p:cBhvr>
-                                        <p:cTn id="12" dur="1" fill="hold">
-                                          <p:stCondLst>
-                                            <p:cond delay="0"/>
-                                          </p:stCondLst>
-                                        </p:cTn>
-                                        <p:tgtEl>
-                                          <p:spTgt spid="112"/>
-                                        </p:tgtEl>
-                                        <p:attrNameLst>
-                                          <p:attrName>style.visibility</p:attrName>
-                                        </p:attrNameLst>
-                                      </p:cBhvr>
-                                      <p:to>
-                                        <p:strVal val="visible"/>
-                                      </p:to>
-                                    </p:set>
-                                    <p:animEffect transition="in" filter="fade">
-                                      <p:cBhvr>
-                                        <p:cTn id="13" dur="500"/>
-                                        <p:tgtEl>
-                                          <p:spTgt spid="112"/>
-                                        </p:tgtEl>
-                                      </p:cBhvr>
-                                    </p:animEffect>
-                                  </p:childTnLst>
-                                </p:cTn>
-                              </p:par>
-                            </p:childTnLst>
-                          </p:cTn>
-                        </p:par>
-                      </p:childTnLst>
-                    </p:cTn>
-                  </p:par>
-                  <p:par>
-                    <p:cTn id="14" fill="hold">
-                      <p:stCondLst>
-                        <p:cond delay="indefinite"/>
-                      </p:stCondLst>
-                      <p:childTnLst>
-                        <p:par>
-                          <p:cTn id="15" fill="hold">
-                            <p:stCondLst>
-                              <p:cond delay="0"/>
-                            </p:stCondLst>
-                            <p:childTnLst>
-                              <p:par>
-                                <p:cTn id="16" presetID="10" presetClass="entr" presetSubtype="0" fill="hold" nodeType="clickEffect">
-                                  <p:stCondLst>
-                                    <p:cond delay="0"/>
-                                  </p:stCondLst>
-                                  <p:childTnLst>
-                                    <p:set>
-                                      <p:cBhvr>
-                                        <p:cTn id="17" dur="1" fill="hold">
-                                          <p:stCondLst>
-                                            <p:cond delay="0"/>
-                                          </p:stCondLst>
-                                        </p:cTn>
-                                        <p:tgtEl>
-                                          <p:spTgt spid="120"/>
-                                        </p:tgtEl>
-                                        <p:attrNameLst>
-                                          <p:attrName>style.visibility</p:attrName>
-                                        </p:attrNameLst>
-                                      </p:cBhvr>
-                                      <p:to>
-                                        <p:strVal val="visible"/>
-                                      </p:to>
-                                    </p:set>
-                                    <p:animEffect transition="in" filter="fade">
-                                      <p:cBhvr>
-                                        <p:cTn id="18" dur="500"/>
-                                        <p:tgtEl>
-                                          <p:spTgt spid="120"/>
-                                        </p:tgtEl>
-                                      </p:cBhvr>
-                                    </p:animEffect>
-                                  </p:childTnLst>
-                                </p:cTn>
-                              </p:par>
-                              <p:par>
-                                <p:cTn id="19" presetID="10" presetClass="entr" presetSubtype="0" fill="hold" nodeType="withEffect">
-                                  <p:stCondLst>
-                                    <p:cond delay="0"/>
-                                  </p:stCondLst>
-                                  <p:childTnLst>
-                                    <p:set>
-                                      <p:cBhvr>
-                                        <p:cTn id="20" dur="1" fill="hold">
-                                          <p:stCondLst>
-                                            <p:cond delay="0"/>
-                                          </p:stCondLst>
-                                        </p:cTn>
-                                        <p:tgtEl>
-                                          <p:spTgt spid="121"/>
-                                        </p:tgtEl>
-                                        <p:attrNameLst>
-                                          <p:attrName>style.visibility</p:attrName>
-                                        </p:attrNameLst>
-                                      </p:cBhvr>
-                                      <p:to>
-                                        <p:strVal val="visible"/>
-                                      </p:to>
-                                    </p:set>
-                                    <p:animEffect transition="in" filter="fade">
-                                      <p:cBhvr>
-                                        <p:cTn id="21" dur="500"/>
-                                        <p:tgtEl>
-                                          <p:spTgt spid="121"/>
-                                        </p:tgtEl>
-                                      </p:cBhvr>
-                                    </p:animEffect>
-                                  </p:childTnLst>
-                                </p:cTn>
-                              </p:par>
-                              <p:par>
-                                <p:cTn id="22" presetID="10" presetClass="entr" presetSubtype="0" fill="hold" nodeType="withEffect">
-                                  <p:stCondLst>
-                                    <p:cond delay="0"/>
-                                  </p:stCondLst>
-                                  <p:childTnLst>
-                                    <p:set>
-                                      <p:cBhvr>
-                                        <p:cTn id="23" dur="1" fill="hold">
-                                          <p:stCondLst>
-                                            <p:cond delay="0"/>
-                                          </p:stCondLst>
-                                        </p:cTn>
-                                        <p:tgtEl>
-                                          <p:spTgt spid="124"/>
-                                        </p:tgtEl>
-                                        <p:attrNameLst>
-                                          <p:attrName>style.visibility</p:attrName>
-                                        </p:attrNameLst>
-                                      </p:cBhvr>
-                                      <p:to>
-                                        <p:strVal val="visible"/>
-                                      </p:to>
-                                    </p:set>
-                                    <p:animEffect transition="in" filter="fade">
-                                      <p:cBhvr>
-                                        <p:cTn id="24" dur="500"/>
-                                        <p:tgtEl>
-                                          <p:spTgt spid="124"/>
-                                        </p:tgtEl>
-                                      </p:cBhvr>
-                                    </p:animEffect>
-                                  </p:childTnLst>
-                                </p:cTn>
-                              </p:par>
-                              <p:par>
-                                <p:cTn id="25" presetID="10" presetClass="entr" presetSubtype="0" fill="hold" nodeType="withEffect">
-                                  <p:stCondLst>
-                                    <p:cond delay="0"/>
-                                  </p:stCondLst>
-                                  <p:childTnLst>
-                                    <p:set>
-                                      <p:cBhvr>
-                                        <p:cTn id="26" dur="1" fill="hold">
-                                          <p:stCondLst>
-                                            <p:cond delay="0"/>
-                                          </p:stCondLst>
-                                        </p:cTn>
-                                        <p:tgtEl>
-                                          <p:spTgt spid="122"/>
-                                        </p:tgtEl>
-                                        <p:attrNameLst>
-                                          <p:attrName>style.visibility</p:attrName>
-                                        </p:attrNameLst>
-                                      </p:cBhvr>
-                                      <p:to>
-                                        <p:strVal val="visible"/>
-                                      </p:to>
-                                    </p:set>
-                                    <p:animEffect transition="in" filter="fade">
-                                      <p:cBhvr>
-                                        <p:cTn id="27" dur="500"/>
-                                        <p:tgtEl>
-                                          <p:spTgt spid="122"/>
-                                        </p:tgtEl>
-                                      </p:cBhvr>
-                                    </p:animEffect>
-                                  </p:childTnLst>
-                                </p:cTn>
-                              </p:par>
-                              <p:par>
-                                <p:cTn id="28" presetID="10" presetClass="entr" presetSubtype="0" fill="hold" nodeType="withEffect">
-                                  <p:stCondLst>
-                                    <p:cond delay="0"/>
-                                  </p:stCondLst>
-                                  <p:childTnLst>
-                                    <p:set>
-                                      <p:cBhvr>
-                                        <p:cTn id="29" dur="1" fill="hold">
-                                          <p:stCondLst>
-                                            <p:cond delay="0"/>
-                                          </p:stCondLst>
-                                        </p:cTn>
-                                        <p:tgtEl>
-                                          <p:spTgt spid="123"/>
-                                        </p:tgtEl>
-                                        <p:attrNameLst>
-                                          <p:attrName>style.visibility</p:attrName>
-                                        </p:attrNameLst>
-                                      </p:cBhvr>
-                                      <p:to>
-                                        <p:strVal val="visible"/>
-                                      </p:to>
-                                    </p:set>
-                                    <p:animEffect transition="in" filter="fade">
-                                      <p:cBhvr>
-                                        <p:cTn id="30" dur="500"/>
-                                        <p:tgtEl>
-                                          <p:spTgt spid="123"/>
-                                        </p:tgtEl>
-                                      </p:cBhvr>
-                                    </p:animEffect>
-                                  </p:childTnLst>
-                                </p:cTn>
-                              </p:par>
-                            </p:childTnLst>
-                          </p:cTn>
-                        </p:par>
-                      </p:childTnLst>
-                    </p:cTn>
-                  </p:par>
-                  <p:par>
-                    <p:cTn id="31" fill="hold">
-                      <p:stCondLst>
-                        <p:cond delay="indefinite"/>
-                      </p:stCondLst>
-                      <p:childTnLst>
-                        <p:par>
-                          <p:cTn id="32" fill="hold">
-                            <p:stCondLst>
-                              <p:cond delay="0"/>
-                            </p:stCondLst>
-                            <p:childTnLst>
-                              <p:par>
-                                <p:cTn id="33" presetID="10" presetClass="entr" presetSubtype="0" fill="hold" nodeType="clickEffect">
-                                  <p:stCondLst>
-                                    <p:cond delay="0"/>
-                                  </p:stCondLst>
-                                  <p:childTnLst>
-                                    <p:set>
-                                      <p:cBhvr>
-                                        <p:cTn id="34" dur="1" fill="hold">
-                                          <p:stCondLst>
-                                            <p:cond delay="0"/>
-                                          </p:stCondLst>
-                                        </p:cTn>
-                                        <p:tgtEl>
-                                          <p:spTgt spid="199"/>
-                                        </p:tgtEl>
-                                        <p:attrNameLst>
-                                          <p:attrName>style.visibility</p:attrName>
-                                        </p:attrNameLst>
-                                      </p:cBhvr>
-                                      <p:to>
-                                        <p:strVal val="visible"/>
-                                      </p:to>
-                                    </p:set>
-                                    <p:animEffect transition="in" filter="fade">
-                                      <p:cBhvr>
-                                        <p:cTn id="35" dur="500"/>
-                                        <p:tgtEl>
-                                          <p:spTgt spid="199"/>
-                                        </p:tgtEl>
-                                      </p:cBhvr>
-                                    </p:animEffect>
-                                  </p:childTnLst>
-                                </p:cTn>
-                              </p:par>
-                            </p:childTnLst>
-                          </p:cTn>
-                        </p:par>
-                      </p:childTnLst>
-                    </p:cTn>
-                  </p:par>
-                </p:childTnLst>
-              </p:cTn>
-              <p:prevCondLst>
-                <p:cond evt="onPrev" delay="0">
-                  <p:tgtEl>
-                    <p:sldTgt/>
-                  </p:tgtEl>
-                </p:cond>
-              </p:prevCondLst>
-              <p:nextCondLst>
-                <p:cond evt="onNext" delay="0">
-                  <p:tgtEl>
-                    <p:sldTgt/>
-                  </p:tgtEl>
-                </p:cond>
-              </p:nextCondLst>
-            </p:seq>
-          </p:childTnLst>
-        </p:cTn>
-      </p:par>
-    </p:tnLst>
-  </p:timing>
 </p:sld>
 </file>
 
